--- a/lecons/F5/06_F5_M1_L06_Secondary_Manufacturing_Industries_in_Cameroon.pptx
+++ b/lecons/F5/06_F5_M1_L06_Secondary_Manufacturing_Industries_in_Cameroon.pptx
@@ -13256,7 +13256,7 @@
         <p:spPr>
           <a:xfrm>
             <a:off x="0" y="658368"/>
-            <a:ext cx="2468880" cy="5833872"/>
+            <a:ext cx="3840480" cy="5833872"/>
           </a:xfrm>
           <a:prstGeom prst="rect">
             <a:avLst/>
@@ -13271,8 +13271,8 @@
         </p:nvSpPr>
         <p:spPr>
           <a:xfrm>
-            <a:off x="2697480" y="1005840"/>
-            <a:ext cx="9174175" cy="731520"/>
+            <a:off x="4069080" y="1005840"/>
+            <a:ext cx="7802575" cy="731520"/>
           </a:xfrm>
           <a:prstGeom prst="rect">
             <a:avLst/>
@@ -13312,8 +13312,8 @@
         </p:nvSpPr>
         <p:spPr>
           <a:xfrm>
-            <a:off x="2697480" y="1783080"/>
-            <a:ext cx="9174175" cy="4663440"/>
+            <a:off x="4069080" y="1783080"/>
+            <a:ext cx="7802575" cy="4663440"/>
           </a:xfrm>
           <a:prstGeom prst="rect">
             <a:avLst/>
@@ -13332,7 +13332,7 @@
               <a:buNone/>
             </a:pPr>
             <a:r>
-              <a:rPr lang="en-US" sz="4000" b="1" dirty="0">
+              <a:rPr lang="en-US" sz="3200" b="1" dirty="0">
                 <a:solidFill>
                   <a:srgbClr val="111111"/>
                 </a:solidFill>
@@ -13342,7 +13342,7 @@
               </a:rPr>
               <a:t>Topic: Managing Resources for Development through Economic Activities</a:t>
             </a:r>
-            <a:endParaRPr lang="en-US" sz="4000" dirty="0"/>
+            <a:endParaRPr lang="en-US" sz="3200" dirty="0"/>
           </a:p>
           <a:p>
             <a:pPr algn="l" indent="0" marL="0">
@@ -13352,7 +13352,7 @@
               <a:buNone/>
             </a:pPr>
             <a:r>
-              <a:rPr lang="en-US" sz="4000" b="1" dirty="0">
+              <a:rPr lang="en-US" sz="3200" b="1" dirty="0">
                 <a:solidFill>
                   <a:srgbClr val="111111"/>
                 </a:solidFill>
@@ -13362,7 +13362,7 @@
               </a:rPr>
               <a:t>Sub-topic: The Economic Development Potentials of Cameroon in the Secondary Sector: Manufacturing Industries</a:t>
             </a:r>
-            <a:endParaRPr lang="en-US" sz="4000" dirty="0"/>
+            <a:endParaRPr lang="en-US" sz="3200" dirty="0"/>
           </a:p>
           <a:p>
             <a:pPr algn="l" indent="0" marL="0">
@@ -13372,7 +13372,7 @@
               <a:buNone/>
             </a:pPr>
             <a:r>
-              <a:rPr lang="en-US" sz="4000" b="1" dirty="0">
+              <a:rPr lang="en-US" sz="3200" b="1" dirty="0">
                 <a:solidFill>
                   <a:srgbClr val="990011"/>
                 </a:solidFill>
@@ -13382,7 +13382,7 @@
               </a:rPr>
               <a:t>Lesson 6: Secondary (Manufacturing) Industries in Cameroon</a:t>
             </a:r>
-            <a:endParaRPr lang="en-US" sz="4000" dirty="0"/>
+            <a:endParaRPr lang="en-US" sz="3200" dirty="0"/>
           </a:p>
         </p:txBody>
       </p:sp>

--- a/lecons/F5/06_F5_M1_L06_Secondary_Manufacturing_Industries_in_Cameroon.pptx
+++ b/lecons/F5/06_F5_M1_L06_Secondary_Manufacturing_Industries_in_Cameroon.pptx
@@ -57,9 +57,14 @@
     <p:sldId id="305" r:id="rId51"/>
     <p:sldId id="306" r:id="rId52"/>
     <p:sldId id="307" r:id="rId53"/>
+    <p:sldId id="308" r:id="rId54"/>
+    <p:sldId id="309" r:id="rId55"/>
+    <p:sldId id="310" r:id="rId56"/>
+    <p:sldId id="311" r:id="rId57"/>
+    <p:sldId id="312" r:id="rId58"/>
   </p:sldIdLst>
   <p:notesMasterIdLst>
-    <p:notesMasterId r:id="rId54"/>
+    <p:notesMasterId r:id="rId59"/>
   </p:notesMasterIdLst>
   <p:sldSz cx="12192000" cy="6858000"/>
   <p:notesSz cx="6858000" cy="12192000"/>
@@ -3017,7 +3022,7 @@
           <a:p>
             <a:r>
               <a:rPr lang="en-US" dirty="0"/>
-              <a:t>Let us copy Types and Distribution. Cameroon has the following industries and regions. On this slide we have Types. Write each point on a new line, with the key term first, and explain it in your own words when we revise. When you finish, we go to the next slide.</a:t>
+              <a:t>Let us copy Types of Industries. Cameroon has the following types of industries. On this slide we have Agro-food industries and Textile industries. Write each point on a new line, with the key term first, and explain it in your own words when we revise. When you finish, we go to the next slide.</a:t>
             </a:r>
             <a:endParaRPr lang="en-US" dirty="0"/>
           </a:p>
@@ -3105,7 +3110,7 @@
           <a:p>
             <a:r>
               <a:rPr lang="en-US" dirty="0"/>
-              <a:t>We continue with Types and Distribution. On this slide we have Coastal region and Other regions. Write each point on a new line, with the key term first, and explain it in your own words when we revise.</a:t>
+              <a:t>We continue with Types of Industries. On this slide we have Metallurgical industries and Other industries. Write each point on a new line, with the key term first, and explain it in your own words when we revise.</a:t>
             </a:r>
             <a:endParaRPr lang="en-US" dirty="0"/>
           </a:p>
@@ -3193,7 +3198,7 @@
           <a:p>
             <a:r>
               <a:rPr lang="en-US" dirty="0"/>
-              <a:t>Now draw this illustration in your notebook: industrial regions of Cameroon. Give it a title and label it clearly.</a:t>
+              <a:t>Let us copy Distribution. Industries are found in the following regions. On this slide we have Coastal region. Write each point on a new line, with the key term first, and explain it in your own words when we revise. When you finish, we go to the next slide.</a:t>
             </a:r>
             <a:endParaRPr lang="en-US" dirty="0"/>
           </a:p>
@@ -3281,7 +3286,7 @@
           <a:p>
             <a:r>
               <a:rPr lang="en-US" dirty="0"/>
-              <a:t>Let us copy Importance and Problems. Industries are important but face problems. On this slide we have Importance and Problems. Write each point on a new line, with the key term first, and explain it in your own words when we revise.</a:t>
+              <a:t>We continue with Distribution. On this slide we have Other regions. Write each point on a new line, with the key term first, and explain it in your own words when we revise.</a:t>
             </a:r>
             <a:endParaRPr lang="en-US" dirty="0"/>
           </a:p>
@@ -3369,7 +3374,7 @@
           <a:p>
             <a:r>
               <a:rPr lang="en-US" dirty="0"/>
-              <a:t>Let us copy Government Efforts. The government boosts industrialisation as follows. On this slide we have Infrastructure and Incentives. Write each point on a new line, with the key term first, and explain it in your own words when we revise. When you finish, we go to the next slide.</a:t>
+              <a:t>Now draw this illustration in your notebook: industrial regions of Cameroon. Give it a title and label it clearly.</a:t>
             </a:r>
             <a:endParaRPr lang="en-US" dirty="0"/>
           </a:p>
@@ -3545,7 +3550,7 @@
           <a:p>
             <a:r>
               <a:rPr lang="en-US" dirty="0"/>
-              <a:t>We continue with Government Efforts. On this slide we have Policy. Write each point on a new line, with the key term first, and explain it in your own words when we revise.</a:t>
+              <a:t>Let us copy Importance. Industries are important for the following reasons. On this slide we have Jobs and Added value. Write each point on a new line, with the key term first, and explain it in your own words when we revise. When you finish, we go to the next slide.</a:t>
             </a:r>
             <a:endParaRPr lang="en-US" dirty="0"/>
           </a:p>
@@ -3633,7 +3638,7 @@
           <a:p>
             <a:r>
               <a:rPr lang="en-US" dirty="0"/>
-              <a:t>Now let us check what you have understood. Question 1: Name three industries of Cameroon and their towns. Answer in your exercise book.</a:t>
+              <a:t>We continue with Importance. On this slide we have Fewer imports. Write each point on a new line, with the key term first, and explain it in your own words when we revise.</a:t>
             </a:r>
             <a:endParaRPr lang="en-US" dirty="0"/>
           </a:p>
@@ -3721,7 +3726,7 @@
           <a:p>
             <a:r>
               <a:rPr lang="en-US" dirty="0"/>
-              <a:t>The expected answer is: aLUCAM (Edéa), CICAM (Garoua), SONARA (Limbe). If you got it right, well done.</a:t>
+              <a:t>Let us copy Problems. Industries face the following problems. On this slide we have Power cuts and Lack of capital. Write each point on a new line, with the key term first, and explain it in your own words when we revise. When you finish, we go to the next slide.</a:t>
             </a:r>
             <a:endParaRPr lang="en-US" dirty="0"/>
           </a:p>
@@ -3809,7 +3814,7 @@
           <a:p>
             <a:r>
               <a:rPr lang="en-US" dirty="0"/>
-              <a:t>Now let us check what you have understood. Question 2: Give two problems of industry in Cameroon. Answer in your exercise book.</a:t>
+              <a:t>We continue with Problems. On this slide we have Poor roads and high taxes and Competition from imports. Write each point on a new line, with the key term first, and explain it in your own words when we revise.</a:t>
             </a:r>
             <a:endParaRPr lang="en-US" dirty="0"/>
           </a:p>
@@ -3897,7 +3902,7 @@
           <a:p>
             <a:r>
               <a:rPr lang="en-US" dirty="0"/>
-              <a:t>The expected answer is: power cuts and competition from imports. If you got it right, well done.</a:t>
+              <a:t>Let us copy Government Efforts. The government boosts industrialisation as follows. On this slide we have Infrastructure and Incentives. Write each point on a new line, with the key term first, and explain it in your own words when we revise. When you finish, we go to the next slide.</a:t>
             </a:r>
             <a:endParaRPr lang="en-US" dirty="0"/>
           </a:p>
@@ -3985,7 +3990,7 @@
           <a:p>
             <a:r>
               <a:rPr lang="en-US" dirty="0"/>
-              <a:t>For those who need more practice, fill in the blanks in your exercise book. The answers are: number 1, Edéa; number 2, Limbe; number 3, Figuil.</a:t>
+              <a:t>We continue with Government Efforts. On this slide we have Policy. Write each point on a new line, with the key term first, and explain it in your own words when we revise.</a:t>
             </a:r>
             <a:endParaRPr lang="en-US" dirty="0"/>
           </a:p>
@@ -4073,7 +4078,7 @@
           <a:p>
             <a:r>
               <a:rPr lang="en-US" dirty="0"/>
-              <a:t>For your homework: Draw a sketch map of the industrial regions of Cameroon and name two industries in each. We shall correct it at the beginning of our next lesson.</a:t>
+              <a:t>Now let us check what you have understood. Question 1: Name three industries of Cameroon and their towns. Answer in your exercise book.</a:t>
             </a:r>
             <a:endParaRPr lang="en-US" dirty="0"/>
           </a:p>
@@ -4161,7 +4166,7 @@
           <a:p>
             <a:r>
               <a:rPr lang="en-US" dirty="0"/>
-              <a:t>Our next lesson will be on Practical Work 1: Location of Economic Activities and Description of Land Use. Thank you for your attention, and see you next time.</a:t>
+              <a:t>The expected answer is: aLUCAM (Edéa), CICAM (Garoua), SONARA (Limbe). If you got it right, well done.</a:t>
             </a:r>
             <a:endParaRPr lang="en-US" dirty="0"/>
           </a:p>
@@ -4249,7 +4254,7 @@
           <a:p>
             <a:r>
               <a:rPr lang="en-US" dirty="0"/>
-              <a:t>Let us play the bilingual game. I say a word in English, and you give me the French word. Then we do the reverse.</a:t>
+              <a:t>Now let us check what you have understood. Question 2: Give two problems of industry in Cameroon. Answer in your exercise book.</a:t>
             </a:r>
             <a:endParaRPr lang="en-US" dirty="0"/>
           </a:p>
@@ -4337,7 +4342,7 @@
           <a:p>
             <a:r>
               <a:rPr lang="en-US" dirty="0"/>
-              <a:t>I record this information in the official logbook of the class after the lesson.</a:t>
+              <a:t>The expected answer is: power cuts and competition from imports. If you got it right, well done.</a:t>
             </a:r>
             <a:endParaRPr lang="en-US" dirty="0"/>
           </a:p>
@@ -4513,7 +4518,7 @@
           <a:p>
             <a:r>
               <a:rPr lang="en-US" dirty="0"/>
-              <a:t>I complete the second page of the logbook: the matter taught, the evaluation, the homework and the attendance.</a:t>
+              <a:t>For those who need more practice, fill in the blanks in your exercise book. The answers are: number 1, Edéa; number 2, Limbe; number 3, Figuil.</a:t>
             </a:r>
             <a:endParaRPr lang="en-US" dirty="0"/>
           </a:p>
@@ -4601,7 +4606,7 @@
           <a:p>
             <a:r>
               <a:rPr lang="en-US" dirty="0"/>
-              <a:t>This slide is for me, the teacher: it gives the timing of the lesson and what to do if the projector is not available.</a:t>
+              <a:t>For your homework: Draw a sketch map of the industrial regions of Cameroon and name two industries in each. We shall correct it at the beginning of our next lesson.</a:t>
             </a:r>
             <a:endParaRPr lang="en-US" dirty="0"/>
           </a:p>
@@ -4689,7 +4694,7 @@
           <a:p>
             <a:r>
               <a:rPr lang="en-US" dirty="0"/>
-              <a:t>These are the references and picture credits used to prepare this lesson.</a:t>
+              <a:t>Our next lesson will be on Practical Work 1: Location of Economic Activities and Description of Land Use. Thank you for your attention, and see you next time.</a:t>
             </a:r>
             <a:endParaRPr lang="en-US" dirty="0"/>
           </a:p>
@@ -4713,6 +4718,446 @@
             <a:fld id="{F7021451-1387-4CA6-816F-3879F97B5CBC}" type="slidenum">
               <a:rPr lang="en-US"/>
               <a:t>52</a:t>
+            </a:fld>
+            <a:endParaRPr lang="en-US"/>
+          </a:p>
+        </p:txBody>
+      </p:sp>
+    </p:spTree>
+    <p:extLst>
+      <p:ext uri="{BB962C8B-B14F-4D97-AF65-F5344CB8AC3E}">
+        <p14:creationId xmlns:p14="http://schemas.microsoft.com/office/powerpoint/2010/main" val="1024086991"/>
+      </p:ext>
+    </p:extLst>
+  </p:cSld>
+  <p:clrMapOvr>
+    <a:masterClrMapping/>
+  </p:clrMapOvr>
+</p:notes>
+</file>
+
+<file path=ppt/notesSlides/notesSlide53.xml><?xml version="1.0" encoding="utf-8"?>
+<p:notes xmlns:a="http://schemas.openxmlformats.org/drawingml/2006/main" xmlns:r="http://schemas.openxmlformats.org/officeDocument/2006/relationships" xmlns:p="http://schemas.openxmlformats.org/presentationml/2006/main">
+  <p:cSld>
+    <p:spTree>
+      <p:nvGrpSpPr>
+        <p:cNvPr id="1" name=""/>
+        <p:cNvGrpSpPr/>
+        <p:nvPr/>
+      </p:nvGrpSpPr>
+      <p:grpSpPr>
+        <a:xfrm>
+          <a:off x="0" y="0"/>
+          <a:ext cx="0" cy="0"/>
+          <a:chOff x="0" y="0"/>
+          <a:chExt cx="0" cy="0"/>
+        </a:xfrm>
+      </p:grpSpPr>
+      <p:sp>
+        <p:nvSpPr>
+          <p:cNvPr id="2" name="Slide Image Placeholder 1"/>
+          <p:cNvSpPr>
+            <a:spLocks noGrp="1" noRot="1" noChangeAspect="1"/>
+          </p:cNvSpPr>
+          <p:nvPr>
+            <p:ph type="sldImg"/>
+          </p:nvPr>
+        </p:nvSpPr>
+        <p:spPr/>
+      </p:sp>
+      <p:sp>
+        <p:nvSpPr>
+          <p:cNvPr id="3" name="Notes Placeholder 2"/>
+          <p:cNvSpPr>
+            <a:spLocks noGrp="1"/>
+          </p:cNvSpPr>
+          <p:nvPr>
+            <p:ph type="body" idx="1"/>
+          </p:nvPr>
+        </p:nvSpPr>
+        <p:spPr/>
+        <p:txBody>
+          <a:bodyPr/>
+          <a:lstStyle/>
+          <a:p>
+            <a:r>
+              <a:rPr lang="en-US" dirty="0"/>
+              <a:t>Let us play the bilingual game. I say a word in English, and you give me the French word. Then we do the reverse.</a:t>
+            </a:r>
+            <a:endParaRPr lang="en-US" dirty="0"/>
+          </a:p>
+        </p:txBody>
+      </p:sp>
+      <p:sp>
+        <p:nvSpPr>
+          <p:cNvPr id="4" name="Slide Number Placeholder 3"/>
+          <p:cNvSpPr>
+            <a:spLocks noGrp="1"/>
+          </p:cNvSpPr>
+          <p:nvPr>
+            <p:ph type="sldNum" sz="quarter" idx="10"/>
+          </p:nvPr>
+        </p:nvSpPr>
+        <p:spPr/>
+        <p:txBody>
+          <a:bodyPr/>
+          <a:lstStyle/>
+          <a:p>
+            <a:fld id="{F7021451-1387-4CA6-816F-3879F97B5CBC}" type="slidenum">
+              <a:rPr lang="en-US"/>
+              <a:t>53</a:t>
+            </a:fld>
+            <a:endParaRPr lang="en-US"/>
+          </a:p>
+        </p:txBody>
+      </p:sp>
+    </p:spTree>
+    <p:extLst>
+      <p:ext uri="{BB962C8B-B14F-4D97-AF65-F5344CB8AC3E}">
+        <p14:creationId xmlns:p14="http://schemas.microsoft.com/office/powerpoint/2010/main" val="1024086991"/>
+      </p:ext>
+    </p:extLst>
+  </p:cSld>
+  <p:clrMapOvr>
+    <a:masterClrMapping/>
+  </p:clrMapOvr>
+</p:notes>
+</file>
+
+<file path=ppt/notesSlides/notesSlide54.xml><?xml version="1.0" encoding="utf-8"?>
+<p:notes xmlns:a="http://schemas.openxmlformats.org/drawingml/2006/main" xmlns:r="http://schemas.openxmlformats.org/officeDocument/2006/relationships" xmlns:p="http://schemas.openxmlformats.org/presentationml/2006/main">
+  <p:cSld>
+    <p:spTree>
+      <p:nvGrpSpPr>
+        <p:cNvPr id="1" name=""/>
+        <p:cNvGrpSpPr/>
+        <p:nvPr/>
+      </p:nvGrpSpPr>
+      <p:grpSpPr>
+        <a:xfrm>
+          <a:off x="0" y="0"/>
+          <a:ext cx="0" cy="0"/>
+          <a:chOff x="0" y="0"/>
+          <a:chExt cx="0" cy="0"/>
+        </a:xfrm>
+      </p:grpSpPr>
+      <p:sp>
+        <p:nvSpPr>
+          <p:cNvPr id="2" name="Slide Image Placeholder 1"/>
+          <p:cNvSpPr>
+            <a:spLocks noGrp="1" noRot="1" noChangeAspect="1"/>
+          </p:cNvSpPr>
+          <p:nvPr>
+            <p:ph type="sldImg"/>
+          </p:nvPr>
+        </p:nvSpPr>
+        <p:spPr/>
+      </p:sp>
+      <p:sp>
+        <p:nvSpPr>
+          <p:cNvPr id="3" name="Notes Placeholder 2"/>
+          <p:cNvSpPr>
+            <a:spLocks noGrp="1"/>
+          </p:cNvSpPr>
+          <p:nvPr>
+            <p:ph type="body" idx="1"/>
+          </p:nvPr>
+        </p:nvSpPr>
+        <p:spPr/>
+        <p:txBody>
+          <a:bodyPr/>
+          <a:lstStyle/>
+          <a:p>
+            <a:r>
+              <a:rPr lang="en-US" dirty="0"/>
+              <a:t>I record this information in the official logbook of the class after the lesson.</a:t>
+            </a:r>
+            <a:endParaRPr lang="en-US" dirty="0"/>
+          </a:p>
+        </p:txBody>
+      </p:sp>
+      <p:sp>
+        <p:nvSpPr>
+          <p:cNvPr id="4" name="Slide Number Placeholder 3"/>
+          <p:cNvSpPr>
+            <a:spLocks noGrp="1"/>
+          </p:cNvSpPr>
+          <p:nvPr>
+            <p:ph type="sldNum" sz="quarter" idx="10"/>
+          </p:nvPr>
+        </p:nvSpPr>
+        <p:spPr/>
+        <p:txBody>
+          <a:bodyPr/>
+          <a:lstStyle/>
+          <a:p>
+            <a:fld id="{F7021451-1387-4CA6-816F-3879F97B5CBC}" type="slidenum">
+              <a:rPr lang="en-US"/>
+              <a:t>54</a:t>
+            </a:fld>
+            <a:endParaRPr lang="en-US"/>
+          </a:p>
+        </p:txBody>
+      </p:sp>
+    </p:spTree>
+    <p:extLst>
+      <p:ext uri="{BB962C8B-B14F-4D97-AF65-F5344CB8AC3E}">
+        <p14:creationId xmlns:p14="http://schemas.microsoft.com/office/powerpoint/2010/main" val="1024086991"/>
+      </p:ext>
+    </p:extLst>
+  </p:cSld>
+  <p:clrMapOvr>
+    <a:masterClrMapping/>
+  </p:clrMapOvr>
+</p:notes>
+</file>
+
+<file path=ppt/notesSlides/notesSlide55.xml><?xml version="1.0" encoding="utf-8"?>
+<p:notes xmlns:a="http://schemas.openxmlformats.org/drawingml/2006/main" xmlns:r="http://schemas.openxmlformats.org/officeDocument/2006/relationships" xmlns:p="http://schemas.openxmlformats.org/presentationml/2006/main">
+  <p:cSld>
+    <p:spTree>
+      <p:nvGrpSpPr>
+        <p:cNvPr id="1" name=""/>
+        <p:cNvGrpSpPr/>
+        <p:nvPr/>
+      </p:nvGrpSpPr>
+      <p:grpSpPr>
+        <a:xfrm>
+          <a:off x="0" y="0"/>
+          <a:ext cx="0" cy="0"/>
+          <a:chOff x="0" y="0"/>
+          <a:chExt cx="0" cy="0"/>
+        </a:xfrm>
+      </p:grpSpPr>
+      <p:sp>
+        <p:nvSpPr>
+          <p:cNvPr id="2" name="Slide Image Placeholder 1"/>
+          <p:cNvSpPr>
+            <a:spLocks noGrp="1" noRot="1" noChangeAspect="1"/>
+          </p:cNvSpPr>
+          <p:nvPr>
+            <p:ph type="sldImg"/>
+          </p:nvPr>
+        </p:nvSpPr>
+        <p:spPr/>
+      </p:sp>
+      <p:sp>
+        <p:nvSpPr>
+          <p:cNvPr id="3" name="Notes Placeholder 2"/>
+          <p:cNvSpPr>
+            <a:spLocks noGrp="1"/>
+          </p:cNvSpPr>
+          <p:nvPr>
+            <p:ph type="body" idx="1"/>
+          </p:nvPr>
+        </p:nvSpPr>
+        <p:spPr/>
+        <p:txBody>
+          <a:bodyPr/>
+          <a:lstStyle/>
+          <a:p>
+            <a:r>
+              <a:rPr lang="en-US" dirty="0"/>
+              <a:t>I complete the second page of the logbook: the matter taught, the evaluation, the homework and the attendance.</a:t>
+            </a:r>
+            <a:endParaRPr lang="en-US" dirty="0"/>
+          </a:p>
+        </p:txBody>
+      </p:sp>
+      <p:sp>
+        <p:nvSpPr>
+          <p:cNvPr id="4" name="Slide Number Placeholder 3"/>
+          <p:cNvSpPr>
+            <a:spLocks noGrp="1"/>
+          </p:cNvSpPr>
+          <p:nvPr>
+            <p:ph type="sldNum" sz="quarter" idx="10"/>
+          </p:nvPr>
+        </p:nvSpPr>
+        <p:spPr/>
+        <p:txBody>
+          <a:bodyPr/>
+          <a:lstStyle/>
+          <a:p>
+            <a:fld id="{F7021451-1387-4CA6-816F-3879F97B5CBC}" type="slidenum">
+              <a:rPr lang="en-US"/>
+              <a:t>55</a:t>
+            </a:fld>
+            <a:endParaRPr lang="en-US"/>
+          </a:p>
+        </p:txBody>
+      </p:sp>
+    </p:spTree>
+    <p:extLst>
+      <p:ext uri="{BB962C8B-B14F-4D97-AF65-F5344CB8AC3E}">
+        <p14:creationId xmlns:p14="http://schemas.microsoft.com/office/powerpoint/2010/main" val="1024086991"/>
+      </p:ext>
+    </p:extLst>
+  </p:cSld>
+  <p:clrMapOvr>
+    <a:masterClrMapping/>
+  </p:clrMapOvr>
+</p:notes>
+</file>
+
+<file path=ppt/notesSlides/notesSlide56.xml><?xml version="1.0" encoding="utf-8"?>
+<p:notes xmlns:a="http://schemas.openxmlformats.org/drawingml/2006/main" xmlns:r="http://schemas.openxmlformats.org/officeDocument/2006/relationships" xmlns:p="http://schemas.openxmlformats.org/presentationml/2006/main">
+  <p:cSld>
+    <p:spTree>
+      <p:nvGrpSpPr>
+        <p:cNvPr id="1" name=""/>
+        <p:cNvGrpSpPr/>
+        <p:nvPr/>
+      </p:nvGrpSpPr>
+      <p:grpSpPr>
+        <a:xfrm>
+          <a:off x="0" y="0"/>
+          <a:ext cx="0" cy="0"/>
+          <a:chOff x="0" y="0"/>
+          <a:chExt cx="0" cy="0"/>
+        </a:xfrm>
+      </p:grpSpPr>
+      <p:sp>
+        <p:nvSpPr>
+          <p:cNvPr id="2" name="Slide Image Placeholder 1"/>
+          <p:cNvSpPr>
+            <a:spLocks noGrp="1" noRot="1" noChangeAspect="1"/>
+          </p:cNvSpPr>
+          <p:nvPr>
+            <p:ph type="sldImg"/>
+          </p:nvPr>
+        </p:nvSpPr>
+        <p:spPr/>
+      </p:sp>
+      <p:sp>
+        <p:nvSpPr>
+          <p:cNvPr id="3" name="Notes Placeholder 2"/>
+          <p:cNvSpPr>
+            <a:spLocks noGrp="1"/>
+          </p:cNvSpPr>
+          <p:nvPr>
+            <p:ph type="body" idx="1"/>
+          </p:nvPr>
+        </p:nvSpPr>
+        <p:spPr/>
+        <p:txBody>
+          <a:bodyPr/>
+          <a:lstStyle/>
+          <a:p>
+            <a:r>
+              <a:rPr lang="en-US" dirty="0"/>
+              <a:t>This slide is for me, the teacher: it gives the timing of the lesson and what to do if the projector is not available.</a:t>
+            </a:r>
+            <a:endParaRPr lang="en-US" dirty="0"/>
+          </a:p>
+        </p:txBody>
+      </p:sp>
+      <p:sp>
+        <p:nvSpPr>
+          <p:cNvPr id="4" name="Slide Number Placeholder 3"/>
+          <p:cNvSpPr>
+            <a:spLocks noGrp="1"/>
+          </p:cNvSpPr>
+          <p:nvPr>
+            <p:ph type="sldNum" sz="quarter" idx="10"/>
+          </p:nvPr>
+        </p:nvSpPr>
+        <p:spPr/>
+        <p:txBody>
+          <a:bodyPr/>
+          <a:lstStyle/>
+          <a:p>
+            <a:fld id="{F7021451-1387-4CA6-816F-3879F97B5CBC}" type="slidenum">
+              <a:rPr lang="en-US"/>
+              <a:t>56</a:t>
+            </a:fld>
+            <a:endParaRPr lang="en-US"/>
+          </a:p>
+        </p:txBody>
+      </p:sp>
+    </p:spTree>
+    <p:extLst>
+      <p:ext uri="{BB962C8B-B14F-4D97-AF65-F5344CB8AC3E}">
+        <p14:creationId xmlns:p14="http://schemas.microsoft.com/office/powerpoint/2010/main" val="1024086991"/>
+      </p:ext>
+    </p:extLst>
+  </p:cSld>
+  <p:clrMapOvr>
+    <a:masterClrMapping/>
+  </p:clrMapOvr>
+</p:notes>
+</file>
+
+<file path=ppt/notesSlides/notesSlide57.xml><?xml version="1.0" encoding="utf-8"?>
+<p:notes xmlns:a="http://schemas.openxmlformats.org/drawingml/2006/main" xmlns:r="http://schemas.openxmlformats.org/officeDocument/2006/relationships" xmlns:p="http://schemas.openxmlformats.org/presentationml/2006/main">
+  <p:cSld>
+    <p:spTree>
+      <p:nvGrpSpPr>
+        <p:cNvPr id="1" name=""/>
+        <p:cNvGrpSpPr/>
+        <p:nvPr/>
+      </p:nvGrpSpPr>
+      <p:grpSpPr>
+        <a:xfrm>
+          <a:off x="0" y="0"/>
+          <a:ext cx="0" cy="0"/>
+          <a:chOff x="0" y="0"/>
+          <a:chExt cx="0" cy="0"/>
+        </a:xfrm>
+      </p:grpSpPr>
+      <p:sp>
+        <p:nvSpPr>
+          <p:cNvPr id="2" name="Slide Image Placeholder 1"/>
+          <p:cNvSpPr>
+            <a:spLocks noGrp="1" noRot="1" noChangeAspect="1"/>
+          </p:cNvSpPr>
+          <p:nvPr>
+            <p:ph type="sldImg"/>
+          </p:nvPr>
+        </p:nvSpPr>
+        <p:spPr/>
+      </p:sp>
+      <p:sp>
+        <p:nvSpPr>
+          <p:cNvPr id="3" name="Notes Placeholder 2"/>
+          <p:cNvSpPr>
+            <a:spLocks noGrp="1"/>
+          </p:cNvSpPr>
+          <p:nvPr>
+            <p:ph type="body" idx="1"/>
+          </p:nvPr>
+        </p:nvSpPr>
+        <p:spPr/>
+        <p:txBody>
+          <a:bodyPr/>
+          <a:lstStyle/>
+          <a:p>
+            <a:r>
+              <a:rPr lang="en-US" dirty="0"/>
+              <a:t>These are the references and picture credits used to prepare this lesson.</a:t>
+            </a:r>
+            <a:endParaRPr lang="en-US" dirty="0"/>
+          </a:p>
+        </p:txBody>
+      </p:sp>
+      <p:sp>
+        <p:nvSpPr>
+          <p:cNvPr id="4" name="Slide Number Placeholder 3"/>
+          <p:cNvSpPr>
+            <a:spLocks noGrp="1"/>
+          </p:cNvSpPr>
+          <p:nvPr>
+            <p:ph type="sldNum" sz="quarter" idx="10"/>
+          </p:nvPr>
+        </p:nvSpPr>
+        <p:spPr/>
+        <p:txBody>
+          <a:bodyPr/>
+          <a:lstStyle/>
+          <a:p>
+            <a:fld id="{F7021451-1387-4CA6-816F-3879F97B5CBC}" type="slidenum">
+              <a:rPr lang="en-US"/>
+              <a:t>57</a:t>
             </a:fld>
             <a:endParaRPr lang="en-US"/>
           </a:p>
@@ -13515,7 +13960,7 @@
         <p:spPr>
           <a:xfrm>
             <a:off x="0" y="658368"/>
-            <a:ext cx="5120640" cy="5833872"/>
+            <a:ext cx="3840480" cy="5833872"/>
           </a:xfrm>
           <a:prstGeom prst="rect">
             <a:avLst/>
@@ -13530,8 +13975,8 @@
         </p:nvSpPr>
         <p:spPr>
           <a:xfrm>
-            <a:off x="5349240" y="1005840"/>
-            <a:ext cx="6522415" cy="731520"/>
+            <a:off x="4069080" y="1005840"/>
+            <a:ext cx="7802575" cy="731520"/>
           </a:xfrm>
           <a:prstGeom prst="rect">
             <a:avLst/>
@@ -13571,8 +14016,47 @@
         </p:nvSpPr>
         <p:spPr>
           <a:xfrm>
-            <a:off x="5349240" y="1783080"/>
-            <a:ext cx="6522415" cy="4663440"/>
+            <a:off x="4069080" y="1737360"/>
+            <a:ext cx="7802575" cy="457200"/>
+          </a:xfrm>
+          <a:prstGeom prst="rect">
+            <a:avLst/>
+          </a:prstGeom>
+          <a:noFill/>
+          <a:ln/>
+        </p:spPr>
+        <p:txBody>
+          <a:bodyPr wrap="square" lIns="0" tIns="0" rIns="0" bIns="0" rtlCol="0" anchor="ctr"/>
+          <a:lstStyle/>
+          <a:p>
+            <a:pPr algn="l" indent="0" marL="0">
+              <a:buNone/>
+            </a:pPr>
+            <a:r>
+              <a:rPr lang="en-US" sz="3200" b="1" dirty="0">
+                <a:solidFill>
+                  <a:srgbClr val="990011"/>
+                </a:solidFill>
+                <a:latin typeface="Times New Roman" pitchFamily="34" charset="0"/>
+                <a:ea typeface="Times New Roman" pitchFamily="34" charset="-122"/>
+                <a:cs typeface="Times New Roman" pitchFamily="34" charset="-120"/>
+              </a:rPr>
+              <a:t>A) Types of Industries</a:t>
+            </a:r>
+            <a:endParaRPr lang="en-US" sz="3200" dirty="0"/>
+          </a:p>
+        </p:txBody>
+      </p:sp>
+      <p:sp>
+        <p:nvSpPr>
+          <p:cNvPr id="6" name="Text 3"/>
+          <p:cNvSpPr/>
+          <p:nvPr/>
+        </p:nvSpPr>
+        <p:spPr>
+          <a:xfrm>
+            <a:off x="4069080" y="2240280"/>
+            <a:ext cx="7802575" cy="4206240"/>
           </a:xfrm>
           <a:prstGeom prst="rect">
             <a:avLst/>
@@ -13599,7 +14083,7 @@
                 <a:ea typeface="Times New Roman" pitchFamily="34" charset="-122"/>
                 <a:cs typeface="Times New Roman" pitchFamily="34" charset="-120"/>
               </a:rPr>
-              <a:t>Cameroon has the following industries and regions:</a:t>
+              <a:t>Cameroon has the following types of industries:</a:t>
             </a:r>
             <a:endParaRPr lang="en-US" sz="4000" dirty="0"/>
           </a:p>
@@ -13619,7 +14103,7 @@
                 <a:ea typeface="Times New Roman" pitchFamily="34" charset="-122"/>
                 <a:cs typeface="Times New Roman" pitchFamily="34" charset="-120"/>
               </a:rPr>
-              <a:t>Types: </a:t>
+              <a:t>Agro-food industries: </a:t>
             </a:r>
             <a:pPr algn="l" indent="0" marL="0">
               <a:spcAft>
@@ -13636,7 +14120,44 @@
                 <a:ea typeface="Times New Roman" pitchFamily="34" charset="-122"/>
                 <a:cs typeface="Times New Roman" pitchFamily="34" charset="-120"/>
               </a:rPr>
-              <a:t>Agro-food, textile, metallurgical, wood, cement, chemical and oil-refining industries.</a:t>
+              <a:t>They make drinks, sugar, oil and flour.</a:t>
+            </a:r>
+            <a:endParaRPr lang="en-US" sz="4000" dirty="0"/>
+          </a:p>
+          <a:p>
+            <a:pPr algn="l" indent="0" marL="0">
+              <a:spcAft>
+                <a:spcPts val="800"/>
+              </a:spcAft>
+              <a:buNone/>
+            </a:pPr>
+            <a:r>
+              <a:rPr lang="en-US" sz="4000" b="1" dirty="0">
+                <a:solidFill>
+                  <a:srgbClr val="111111"/>
+                </a:solidFill>
+                <a:latin typeface="Times New Roman" pitchFamily="34" charset="0"/>
+                <a:ea typeface="Times New Roman" pitchFamily="34" charset="-122"/>
+                <a:cs typeface="Times New Roman" pitchFamily="34" charset="-120"/>
+              </a:rPr>
+              <a:t>Textile industries: </a:t>
+            </a:r>
+            <a:pPr algn="l" indent="0" marL="0">
+              <a:spcAft>
+                <a:spcPts val="800"/>
+              </a:spcAft>
+              <a:buNone/>
+            </a:pPr>
+            <a:r>
+              <a:rPr lang="en-US" sz="4000" dirty="0">
+                <a:solidFill>
+                  <a:srgbClr val="111111"/>
+                </a:solidFill>
+                <a:latin typeface="Times New Roman" pitchFamily="34" charset="0"/>
+                <a:ea typeface="Times New Roman" pitchFamily="34" charset="-122"/>
+                <a:cs typeface="Times New Roman" pitchFamily="34" charset="-120"/>
+              </a:rPr>
+              <a:t>They make cloth from cotton.</a:t>
             </a:r>
             <a:endParaRPr lang="en-US" sz="4000" dirty="0"/>
           </a:p>
@@ -13771,7 +14292,7 @@
         <p:spPr>
           <a:xfrm>
             <a:off x="0" y="658368"/>
-            <a:ext cx="3840480" cy="5833872"/>
+            <a:ext cx="5120640" cy="5833872"/>
           </a:xfrm>
           <a:prstGeom prst="rect">
             <a:avLst/>
@@ -13786,8 +14307,8 @@
         </p:nvSpPr>
         <p:spPr>
           <a:xfrm>
-            <a:off x="4069080" y="1005840"/>
-            <a:ext cx="7802575" cy="731520"/>
+            <a:off x="5349240" y="1005840"/>
+            <a:ext cx="6522415" cy="731520"/>
           </a:xfrm>
           <a:prstGeom prst="rect">
             <a:avLst/>
@@ -13813,7 +14334,7 @@
                 <a:ea typeface="Times New Roman" pitchFamily="34" charset="-122"/>
                 <a:cs typeface="Times New Roman" pitchFamily="34" charset="-120"/>
               </a:rPr>
-              <a:t>1. Types and Distribution (continued)</a:t>
+              <a:t>1. Types and Distribution</a:t>
             </a:r>
             <a:endParaRPr lang="en-US" sz="3600" dirty="0"/>
           </a:p>
@@ -13827,8 +14348,47 @@
         </p:nvSpPr>
         <p:spPr>
           <a:xfrm>
-            <a:off x="4069080" y="1783080"/>
-            <a:ext cx="7802575" cy="4663440"/>
+            <a:off x="5349240" y="1737360"/>
+            <a:ext cx="6522415" cy="457200"/>
+          </a:xfrm>
+          <a:prstGeom prst="rect">
+            <a:avLst/>
+          </a:prstGeom>
+          <a:noFill/>
+          <a:ln/>
+        </p:spPr>
+        <p:txBody>
+          <a:bodyPr wrap="square" lIns="0" tIns="0" rIns="0" bIns="0" rtlCol="0" anchor="ctr"/>
+          <a:lstStyle/>
+          <a:p>
+            <a:pPr algn="l" indent="0" marL="0">
+              <a:buNone/>
+            </a:pPr>
+            <a:r>
+              <a:rPr lang="en-US" sz="3000" b="1" dirty="0">
+                <a:solidFill>
+                  <a:srgbClr val="990011"/>
+                </a:solidFill>
+                <a:latin typeface="Times New Roman" pitchFamily="34" charset="0"/>
+                <a:ea typeface="Times New Roman" pitchFamily="34" charset="-122"/>
+                <a:cs typeface="Times New Roman" pitchFamily="34" charset="-120"/>
+              </a:rPr>
+              <a:t>A) Types of Industries (continued)</a:t>
+            </a:r>
+            <a:endParaRPr lang="en-US" sz="3000" dirty="0"/>
+          </a:p>
+        </p:txBody>
+      </p:sp>
+      <p:sp>
+        <p:nvSpPr>
+          <p:cNvPr id="6" name="Text 3"/>
+          <p:cNvSpPr/>
+          <p:nvPr/>
+        </p:nvSpPr>
+        <p:spPr>
+          <a:xfrm>
+            <a:off x="5349240" y="2240280"/>
+            <a:ext cx="6522415" cy="4206240"/>
           </a:xfrm>
           <a:prstGeom prst="rect">
             <a:avLst/>
@@ -13855,7 +14415,7 @@
                 <a:ea typeface="Times New Roman" pitchFamily="34" charset="-122"/>
                 <a:cs typeface="Times New Roman" pitchFamily="34" charset="-120"/>
               </a:rPr>
-              <a:t>Coastal region: </a:t>
+              <a:t>Metallurgical industries: </a:t>
             </a:r>
             <a:pPr algn="l" indent="0" marL="0">
               <a:spcAft>
@@ -13872,7 +14432,7 @@
                 <a:ea typeface="Times New Roman" pitchFamily="34" charset="-122"/>
                 <a:cs typeface="Times New Roman" pitchFamily="34" charset="-120"/>
               </a:rPr>
-              <a:t>Douala, Edéa and Limbe have most factories (drinks, soap, aluminium, oil refining).</a:t>
+              <a:t>They make aluminium and metal goods.</a:t>
             </a:r>
             <a:endParaRPr lang="en-US" sz="4000" dirty="0"/>
           </a:p>
@@ -13892,7 +14452,7 @@
                 <a:ea typeface="Times New Roman" pitchFamily="34" charset="-122"/>
                 <a:cs typeface="Times New Roman" pitchFamily="34" charset="-120"/>
               </a:rPr>
-              <a:t>Other regions: </a:t>
+              <a:t>Other industries: </a:t>
             </a:r>
             <a:pPr algn="l" indent="0" marL="0">
               <a:spcAft>
@@ -13909,7 +14469,7 @@
                 <a:ea typeface="Times New Roman" pitchFamily="34" charset="-122"/>
                 <a:cs typeface="Times New Roman" pitchFamily="34" charset="-120"/>
               </a:rPr>
-              <a:t>Yaoundé (food, printing), Bafoussam (coffee, food) and Garoua and Figuil in the north (textiles, cement).</a:t>
+              <a:t>Wood, cement, chemical and oil-refining industries.</a:t>
             </a:r>
             <a:endParaRPr lang="en-US" sz="4000" dirty="0"/>
           </a:p>
@@ -14027,48 +14587,9 @@
           </a:p>
         </p:txBody>
       </p:sp>
-      <p:sp>
-        <p:nvSpPr>
-          <p:cNvPr id="3" name="Text 1"/>
-          <p:cNvSpPr/>
-          <p:nvPr/>
-        </p:nvSpPr>
-        <p:spPr>
-          <a:xfrm>
-            <a:off x="457200" y="1005840"/>
-            <a:ext cx="11277295" cy="731520"/>
-          </a:xfrm>
-          <a:prstGeom prst="rect">
-            <a:avLst/>
-          </a:prstGeom>
-          <a:noFill/>
-          <a:ln/>
-        </p:spPr>
-        <p:txBody>
-          <a:bodyPr wrap="square" lIns="0" tIns="0" rIns="0" bIns="0" rtlCol="0" anchor="ctr"/>
-          <a:lstStyle/>
-          <a:p>
-            <a:pPr algn="ctr" indent="0" marL="0">
-              <a:buNone/>
-            </a:pPr>
-            <a:r>
-              <a:rPr lang="en-US" sz="3600" b="1" dirty="0">
-                <a:solidFill>
-                  <a:srgbClr val="990011"/>
-                </a:solidFill>
-                <a:latin typeface="Times New Roman" pitchFamily="34" charset="0"/>
-                <a:ea typeface="Times New Roman" pitchFamily="34" charset="-122"/>
-                <a:cs typeface="Times New Roman" pitchFamily="34" charset="-120"/>
-              </a:rPr>
-              <a:t>1. Types and Distribution</a:t>
-            </a:r>
-            <a:endParaRPr lang="en-US" sz="3600" dirty="0"/>
-          </a:p>
-        </p:txBody>
-      </p:sp>
       <p:pic>
         <p:nvPicPr>
-          <p:cNvPr id="4" name="Image 0" descr="/home/claude/f4/img/v2/cmr_industry_big.png">    </p:cNvPr>
+          <p:cNvPr id="3" name="Image 0" descr="/home/claude/f4/img/minesec_sheet.png">    </p:cNvPr>
           <p:cNvPicPr>
             <a:picLocks noChangeAspect="1"/>
           </p:cNvPicPr>
@@ -14082,8 +14603,8 @@
         </p:blipFill>
         <p:spPr>
           <a:xfrm>
-            <a:off x="1825600" y="1783080"/>
-            <a:ext cx="8540496" cy="4270248"/>
+            <a:off x="0" y="658368"/>
+            <a:ext cx="5120640" cy="5833872"/>
           </a:xfrm>
           <a:prstGeom prst="rect">
             <a:avLst/>
@@ -14092,14 +14613,14 @@
       </p:pic>
       <p:sp>
         <p:nvSpPr>
-          <p:cNvPr id="5" name="Text 2"/>
+          <p:cNvPr id="4" name="Text 1"/>
           <p:cNvSpPr/>
           <p:nvPr/>
         </p:nvSpPr>
         <p:spPr>
           <a:xfrm>
-            <a:off x="457200" y="6089904"/>
-            <a:ext cx="11277295" cy="347472"/>
+            <a:off x="5349240" y="1005840"/>
+            <a:ext cx="6522415" cy="731520"/>
           </a:xfrm>
           <a:prstGeom prst="rect">
             <a:avLst/>
@@ -14108,24 +14629,144 @@
           <a:ln/>
         </p:spPr>
         <p:txBody>
-          <a:bodyPr wrap="square" lIns="0" tIns="0" rIns="0" bIns="0" rtlCol="0" anchor="ctr"/>
+          <a:bodyPr wrap="square" lIns="0" tIns="0" rIns="0" bIns="0" rtlCol="0" anchor="ctr">
+            <a:normAutofit/>
+          </a:bodyPr>
           <a:lstStyle/>
           <a:p>
             <a:pPr algn="ctr" indent="0" marL="0">
               <a:buNone/>
             </a:pPr>
             <a:r>
-              <a:rPr lang="en-US" sz="1800" i="1" dirty="0">
-                <a:solidFill>
-                  <a:srgbClr val="555555"/>
+              <a:rPr lang="en-US" sz="3600" b="1" dirty="0">
+                <a:solidFill>
+                  <a:srgbClr val="990011"/>
                 </a:solidFill>
                 <a:latin typeface="Times New Roman" pitchFamily="34" charset="0"/>
                 <a:ea typeface="Times New Roman" pitchFamily="34" charset="-122"/>
                 <a:cs typeface="Times New Roman" pitchFamily="34" charset="-120"/>
               </a:rPr>
-              <a:t>Illustration: industrial regions of Cameroon</a:t>
-            </a:r>
-            <a:endParaRPr lang="en-US" sz="1800" dirty="0"/>
+              <a:t>1. Types and Distribution</a:t>
+            </a:r>
+            <a:endParaRPr lang="en-US" sz="3600" dirty="0"/>
+          </a:p>
+        </p:txBody>
+      </p:sp>
+      <p:sp>
+        <p:nvSpPr>
+          <p:cNvPr id="5" name="Text 2"/>
+          <p:cNvSpPr/>
+          <p:nvPr/>
+        </p:nvSpPr>
+        <p:spPr>
+          <a:xfrm>
+            <a:off x="5349240" y="1737360"/>
+            <a:ext cx="6522415" cy="457200"/>
+          </a:xfrm>
+          <a:prstGeom prst="rect">
+            <a:avLst/>
+          </a:prstGeom>
+          <a:noFill/>
+          <a:ln/>
+        </p:spPr>
+        <p:txBody>
+          <a:bodyPr wrap="square" lIns="0" tIns="0" rIns="0" bIns="0" rtlCol="0" anchor="ctr"/>
+          <a:lstStyle/>
+          <a:p>
+            <a:pPr algn="l" indent="0" marL="0">
+              <a:buNone/>
+            </a:pPr>
+            <a:r>
+              <a:rPr lang="en-US" sz="3200" b="1" dirty="0">
+                <a:solidFill>
+                  <a:srgbClr val="990011"/>
+                </a:solidFill>
+                <a:latin typeface="Times New Roman" pitchFamily="34" charset="0"/>
+                <a:ea typeface="Times New Roman" pitchFamily="34" charset="-122"/>
+                <a:cs typeface="Times New Roman" pitchFamily="34" charset="-120"/>
+              </a:rPr>
+              <a:t>B) Distribution</a:t>
+            </a:r>
+            <a:endParaRPr lang="en-US" sz="3200" dirty="0"/>
+          </a:p>
+        </p:txBody>
+      </p:sp>
+      <p:sp>
+        <p:nvSpPr>
+          <p:cNvPr id="6" name="Text 3"/>
+          <p:cNvSpPr/>
+          <p:nvPr/>
+        </p:nvSpPr>
+        <p:spPr>
+          <a:xfrm>
+            <a:off x="5349240" y="2240280"/>
+            <a:ext cx="6522415" cy="4206240"/>
+          </a:xfrm>
+          <a:prstGeom prst="rect">
+            <a:avLst/>
+          </a:prstGeom>
+          <a:noFill/>
+          <a:ln/>
+        </p:spPr>
+        <p:txBody>
+          <a:bodyPr wrap="square" lIns="0" tIns="0" rIns="0" bIns="0" rtlCol="0" anchor="t"/>
+          <a:lstStyle/>
+          <a:p>
+            <a:pPr algn="l" indent="0" marL="0">
+              <a:spcAft>
+                <a:spcPts val="800"/>
+              </a:spcAft>
+              <a:buNone/>
+            </a:pPr>
+            <a:r>
+              <a:rPr lang="en-US" sz="4000" i="1" dirty="0">
+                <a:solidFill>
+                  <a:srgbClr val="111111"/>
+                </a:solidFill>
+                <a:latin typeface="Times New Roman" pitchFamily="34" charset="0"/>
+                <a:ea typeface="Times New Roman" pitchFamily="34" charset="-122"/>
+                <a:cs typeface="Times New Roman" pitchFamily="34" charset="-120"/>
+              </a:rPr>
+              <a:t>Industries are found in the following regions:</a:t>
+            </a:r>
+            <a:endParaRPr lang="en-US" sz="4000" dirty="0"/>
+          </a:p>
+          <a:p>
+            <a:pPr algn="l" indent="0" marL="0">
+              <a:spcAft>
+                <a:spcPts val="800"/>
+              </a:spcAft>
+              <a:buNone/>
+            </a:pPr>
+            <a:r>
+              <a:rPr lang="en-US" sz="4000" b="1" dirty="0">
+                <a:solidFill>
+                  <a:srgbClr val="111111"/>
+                </a:solidFill>
+                <a:latin typeface="Times New Roman" pitchFamily="34" charset="0"/>
+                <a:ea typeface="Times New Roman" pitchFamily="34" charset="-122"/>
+                <a:cs typeface="Times New Roman" pitchFamily="34" charset="-120"/>
+              </a:rPr>
+              <a:t>Coastal region: </a:t>
+            </a:r>
+            <a:pPr algn="l" indent="0" marL="0">
+              <a:spcAft>
+                <a:spcPts val="800"/>
+              </a:spcAft>
+              <a:buNone/>
+            </a:pPr>
+            <a:r>
+              <a:rPr lang="en-US" sz="4000" dirty="0">
+                <a:solidFill>
+                  <a:srgbClr val="111111"/>
+                </a:solidFill>
+                <a:latin typeface="Times New Roman" pitchFamily="34" charset="0"/>
+                <a:ea typeface="Times New Roman" pitchFamily="34" charset="-122"/>
+                <a:cs typeface="Times New Roman" pitchFamily="34" charset="-120"/>
+              </a:rPr>
+              <a:t>Douala, Edéa and Limbe have most factories (drinks, soap, aluminium, oil refining).</a:t>
+            </a:r>
+            <a:endParaRPr lang="en-US" sz="4000" dirty="0"/>
           </a:p>
         </p:txBody>
       </p:sp>
@@ -14258,7 +14899,7 @@
         <p:spPr>
           <a:xfrm>
             <a:off x="0" y="658368"/>
-            <a:ext cx="2468880" cy="5833872"/>
+            <a:ext cx="5120640" cy="5833872"/>
           </a:xfrm>
           <a:prstGeom prst="rect">
             <a:avLst/>
@@ -14273,8 +14914,8 @@
         </p:nvSpPr>
         <p:spPr>
           <a:xfrm>
-            <a:off x="2697480" y="1005840"/>
-            <a:ext cx="9174175" cy="731520"/>
+            <a:off x="5349240" y="1005840"/>
+            <a:ext cx="6522415" cy="731520"/>
           </a:xfrm>
           <a:prstGeom prst="rect">
             <a:avLst/>
@@ -14300,7 +14941,7 @@
                 <a:ea typeface="Times New Roman" pitchFamily="34" charset="-122"/>
                 <a:cs typeface="Times New Roman" pitchFamily="34" charset="-120"/>
               </a:rPr>
-              <a:t>2. Importance and Problems</a:t>
+              <a:t>1. Types and Distribution</a:t>
             </a:r>
             <a:endParaRPr lang="en-US" sz="3600" dirty="0"/>
           </a:p>
@@ -14314,8 +14955,47 @@
         </p:nvSpPr>
         <p:spPr>
           <a:xfrm>
-            <a:off x="2697480" y="1783080"/>
-            <a:ext cx="9174175" cy="4663440"/>
+            <a:off x="5349240" y="1737360"/>
+            <a:ext cx="6522415" cy="457200"/>
+          </a:xfrm>
+          <a:prstGeom prst="rect">
+            <a:avLst/>
+          </a:prstGeom>
+          <a:noFill/>
+          <a:ln/>
+        </p:spPr>
+        <p:txBody>
+          <a:bodyPr wrap="square" lIns="0" tIns="0" rIns="0" bIns="0" rtlCol="0" anchor="ctr"/>
+          <a:lstStyle/>
+          <a:p>
+            <a:pPr algn="l" indent="0" marL="0">
+              <a:buNone/>
+            </a:pPr>
+            <a:r>
+              <a:rPr lang="en-US" sz="3200" b="1" dirty="0">
+                <a:solidFill>
+                  <a:srgbClr val="990011"/>
+                </a:solidFill>
+                <a:latin typeface="Times New Roman" pitchFamily="34" charset="0"/>
+                <a:ea typeface="Times New Roman" pitchFamily="34" charset="-122"/>
+                <a:cs typeface="Times New Roman" pitchFamily="34" charset="-120"/>
+              </a:rPr>
+              <a:t>B) Distribution (continued)</a:t>
+            </a:r>
+            <a:endParaRPr lang="en-US" sz="3200" dirty="0"/>
+          </a:p>
+        </p:txBody>
+      </p:sp>
+      <p:sp>
+        <p:nvSpPr>
+          <p:cNvPr id="6" name="Text 3"/>
+          <p:cNvSpPr/>
+          <p:nvPr/>
+        </p:nvSpPr>
+        <p:spPr>
+          <a:xfrm>
+            <a:off x="5349240" y="2240280"/>
+            <a:ext cx="6522415" cy="4206240"/>
           </a:xfrm>
           <a:prstGeom prst="rect">
             <a:avLst/>
@@ -14334,7 +15014,7 @@
               <a:buNone/>
             </a:pPr>
             <a:r>
-              <a:rPr lang="en-US" sz="4000" i="1" dirty="0">
+              <a:rPr lang="en-US" sz="4000" b="1" dirty="0">
                 <a:solidFill>
                   <a:srgbClr val="111111"/>
                 </a:solidFill>
@@ -14342,11 +15022,8 @@
                 <a:ea typeface="Times New Roman" pitchFamily="34" charset="-122"/>
                 <a:cs typeface="Times New Roman" pitchFamily="34" charset="-120"/>
               </a:rPr>
-              <a:t>Industries are important but face problems:</a:t>
-            </a:r>
-            <a:endParaRPr lang="en-US" sz="4000" dirty="0"/>
-          </a:p>
-          <a:p>
+              <a:t>Other regions: </a:t>
+            </a:r>
             <a:pPr algn="l" indent="0" marL="0">
               <a:spcAft>
                 <a:spcPts val="800"/>
@@ -14354,7 +15031,7 @@
               <a:buNone/>
             </a:pPr>
             <a:r>
-              <a:rPr lang="en-US" sz="4000" b="1" dirty="0">
+              <a:rPr lang="en-US" sz="4000" dirty="0">
                 <a:solidFill>
                   <a:srgbClr val="111111"/>
                 </a:solidFill>
@@ -14362,61 +15039,7 @@
                 <a:ea typeface="Times New Roman" pitchFamily="34" charset="-122"/>
                 <a:cs typeface="Times New Roman" pitchFamily="34" charset="-120"/>
               </a:rPr>
-              <a:t>Importance: </a:t>
-            </a:r>
-            <a:pPr algn="l" indent="0" marL="0">
-              <a:spcAft>
-                <a:spcPts val="800"/>
-              </a:spcAft>
-              <a:buNone/>
-            </a:pPr>
-            <a:r>
-              <a:rPr lang="en-US" sz="4000" dirty="0">
-                <a:solidFill>
-                  <a:srgbClr val="111111"/>
-                </a:solidFill>
-                <a:latin typeface="Times New Roman" pitchFamily="34" charset="0"/>
-                <a:ea typeface="Times New Roman" pitchFamily="34" charset="-122"/>
-                <a:cs typeface="Times New Roman" pitchFamily="34" charset="-120"/>
-              </a:rPr>
-              <a:t>They create jobs, add value to raw materials and reduce imports.</a:t>
-            </a:r>
-            <a:endParaRPr lang="en-US" sz="4000" dirty="0"/>
-          </a:p>
-          <a:p>
-            <a:pPr algn="l" indent="0" marL="0">
-              <a:spcAft>
-                <a:spcPts val="800"/>
-              </a:spcAft>
-              <a:buNone/>
-            </a:pPr>
-            <a:r>
-              <a:rPr lang="en-US" sz="4000" b="1" dirty="0">
-                <a:solidFill>
-                  <a:srgbClr val="111111"/>
-                </a:solidFill>
-                <a:latin typeface="Times New Roman" pitchFamily="34" charset="0"/>
-                <a:ea typeface="Times New Roman" pitchFamily="34" charset="-122"/>
-                <a:cs typeface="Times New Roman" pitchFamily="34" charset="-120"/>
-              </a:rPr>
-              <a:t>Problems: </a:t>
-            </a:r>
-            <a:pPr algn="l" indent="0" marL="0">
-              <a:spcAft>
-                <a:spcPts val="800"/>
-              </a:spcAft>
-              <a:buNone/>
-            </a:pPr>
-            <a:r>
-              <a:rPr lang="en-US" sz="4000" dirty="0">
-                <a:solidFill>
-                  <a:srgbClr val="111111"/>
-                </a:solidFill>
-                <a:latin typeface="Times New Roman" pitchFamily="34" charset="0"/>
-                <a:ea typeface="Times New Roman" pitchFamily="34" charset="-122"/>
-                <a:cs typeface="Times New Roman" pitchFamily="34" charset="-120"/>
-              </a:rPr>
-              <a:t>Power cuts, lack of capital, poor roads, high taxes and competition from imports slow industry.</a:t>
+              <a:t>Yaoundé (food, printing), Bafoussam (coffee, food) and Garoua and Figuil in the north (textiles, cement).</a:t>
             </a:r>
             <a:endParaRPr lang="en-US" sz="4000" dirty="0"/>
           </a:p>
@@ -14534,9 +15157,48 @@
           </a:p>
         </p:txBody>
       </p:sp>
+      <p:sp>
+        <p:nvSpPr>
+          <p:cNvPr id="3" name="Text 1"/>
+          <p:cNvSpPr/>
+          <p:nvPr/>
+        </p:nvSpPr>
+        <p:spPr>
+          <a:xfrm>
+            <a:off x="457200" y="1005840"/>
+            <a:ext cx="11277295" cy="731520"/>
+          </a:xfrm>
+          <a:prstGeom prst="rect">
+            <a:avLst/>
+          </a:prstGeom>
+          <a:noFill/>
+          <a:ln/>
+        </p:spPr>
+        <p:txBody>
+          <a:bodyPr wrap="square" lIns="0" tIns="0" rIns="0" bIns="0" rtlCol="0" anchor="ctr"/>
+          <a:lstStyle/>
+          <a:p>
+            <a:pPr algn="ctr" indent="0" marL="0">
+              <a:buNone/>
+            </a:pPr>
+            <a:r>
+              <a:rPr lang="en-US" sz="3600" b="1" dirty="0">
+                <a:solidFill>
+                  <a:srgbClr val="990011"/>
+                </a:solidFill>
+                <a:latin typeface="Times New Roman" pitchFamily="34" charset="0"/>
+                <a:ea typeface="Times New Roman" pitchFamily="34" charset="-122"/>
+                <a:cs typeface="Times New Roman" pitchFamily="34" charset="-120"/>
+              </a:rPr>
+              <a:t>1. Types and Distribution</a:t>
+            </a:r>
+            <a:endParaRPr lang="en-US" sz="3600" dirty="0"/>
+          </a:p>
+        </p:txBody>
+      </p:sp>
       <p:pic>
         <p:nvPicPr>
-          <p:cNvPr id="3" name="Image 0" descr="/home/claude/f4/img/minesec_sheet.png">    </p:cNvPr>
+          <p:cNvPr id="4" name="Image 0" descr="/home/claude/f4/img/v2/cmr_industry_big.png">    </p:cNvPr>
           <p:cNvPicPr>
             <a:picLocks noChangeAspect="1"/>
           </p:cNvPicPr>
@@ -14550,8 +15212,8 @@
         </p:blipFill>
         <p:spPr>
           <a:xfrm>
-            <a:off x="0" y="658368"/>
-            <a:ext cx="3840480" cy="5833872"/>
+            <a:off x="1825600" y="1783080"/>
+            <a:ext cx="8540496" cy="4270248"/>
           </a:xfrm>
           <a:prstGeom prst="rect">
             <a:avLst/>
@@ -14560,14 +15222,14 @@
       </p:pic>
       <p:sp>
         <p:nvSpPr>
-          <p:cNvPr id="4" name="Text 1"/>
+          <p:cNvPr id="5" name="Text 2"/>
           <p:cNvSpPr/>
           <p:nvPr/>
         </p:nvSpPr>
         <p:spPr>
           <a:xfrm>
-            <a:off x="4069080" y="1005840"/>
-            <a:ext cx="7802575" cy="731520"/>
+            <a:off x="457200" y="6089904"/>
+            <a:ext cx="11277295" cy="347472"/>
           </a:xfrm>
           <a:prstGeom prst="rect">
             <a:avLst/>
@@ -14576,142 +15238,24 @@
           <a:ln/>
         </p:spPr>
         <p:txBody>
-          <a:bodyPr wrap="square" lIns="0" tIns="0" rIns="0" bIns="0" rtlCol="0" anchor="ctr">
-            <a:normAutofit/>
-          </a:bodyPr>
+          <a:bodyPr wrap="square" lIns="0" tIns="0" rIns="0" bIns="0" rtlCol="0" anchor="ctr"/>
           <a:lstStyle/>
           <a:p>
             <a:pPr algn="ctr" indent="0" marL="0">
               <a:buNone/>
             </a:pPr>
             <a:r>
-              <a:rPr lang="en-US" sz="3600" b="1" dirty="0">
-                <a:solidFill>
-                  <a:srgbClr val="990011"/>
+              <a:rPr lang="en-US" sz="1800" i="1" dirty="0">
+                <a:solidFill>
+                  <a:srgbClr val="555555"/>
                 </a:solidFill>
                 <a:latin typeface="Times New Roman" pitchFamily="34" charset="0"/>
                 <a:ea typeface="Times New Roman" pitchFamily="34" charset="-122"/>
                 <a:cs typeface="Times New Roman" pitchFamily="34" charset="-120"/>
               </a:rPr>
-              <a:t>3. Government Efforts</a:t>
-            </a:r>
-            <a:endParaRPr lang="en-US" sz="3600" dirty="0"/>
-          </a:p>
-        </p:txBody>
-      </p:sp>
-      <p:sp>
-        <p:nvSpPr>
-          <p:cNvPr id="5" name="Text 2"/>
-          <p:cNvSpPr/>
-          <p:nvPr/>
-        </p:nvSpPr>
-        <p:spPr>
-          <a:xfrm>
-            <a:off x="4069080" y="1783080"/>
-            <a:ext cx="7802575" cy="4663440"/>
-          </a:xfrm>
-          <a:prstGeom prst="rect">
-            <a:avLst/>
-          </a:prstGeom>
-          <a:noFill/>
-          <a:ln/>
-        </p:spPr>
-        <p:txBody>
-          <a:bodyPr wrap="square" lIns="0" tIns="0" rIns="0" bIns="0" rtlCol="0" anchor="t"/>
-          <a:lstStyle/>
-          <a:p>
-            <a:pPr algn="l" indent="0" marL="0">
-              <a:spcAft>
-                <a:spcPts val="800"/>
-              </a:spcAft>
-              <a:buNone/>
-            </a:pPr>
-            <a:r>
-              <a:rPr lang="en-US" sz="4000" i="1" dirty="0">
-                <a:solidFill>
-                  <a:srgbClr val="111111"/>
-                </a:solidFill>
-                <a:latin typeface="Times New Roman" pitchFamily="34" charset="0"/>
-                <a:ea typeface="Times New Roman" pitchFamily="34" charset="-122"/>
-                <a:cs typeface="Times New Roman" pitchFamily="34" charset="-120"/>
-              </a:rPr>
-              <a:t>The government boosts industrialisation as follows:</a:t>
-            </a:r>
-            <a:endParaRPr lang="en-US" sz="4000" dirty="0"/>
-          </a:p>
-          <a:p>
-            <a:pPr algn="l" indent="0" marL="0">
-              <a:spcAft>
-                <a:spcPts val="800"/>
-              </a:spcAft>
-              <a:buNone/>
-            </a:pPr>
-            <a:r>
-              <a:rPr lang="en-US" sz="4000" b="1" dirty="0">
-                <a:solidFill>
-                  <a:srgbClr val="111111"/>
-                </a:solidFill>
-                <a:latin typeface="Times New Roman" pitchFamily="34" charset="0"/>
-                <a:ea typeface="Times New Roman" pitchFamily="34" charset="-122"/>
-                <a:cs typeface="Times New Roman" pitchFamily="34" charset="-120"/>
-              </a:rPr>
-              <a:t>Infrastructure: </a:t>
-            </a:r>
-            <a:pPr algn="l" indent="0" marL="0">
-              <a:spcAft>
-                <a:spcPts val="800"/>
-              </a:spcAft>
-              <a:buNone/>
-            </a:pPr>
-            <a:r>
-              <a:rPr lang="en-US" sz="4000" dirty="0">
-                <a:solidFill>
-                  <a:srgbClr val="111111"/>
-                </a:solidFill>
-                <a:latin typeface="Times New Roman" pitchFamily="34" charset="0"/>
-                <a:ea typeface="Times New Roman" pitchFamily="34" charset="-122"/>
-                <a:cs typeface="Times New Roman" pitchFamily="34" charset="-120"/>
-              </a:rPr>
-              <a:t>It builds dams, roads and the Kribi deep-sea port.</a:t>
-            </a:r>
-            <a:endParaRPr lang="en-US" sz="4000" dirty="0"/>
-          </a:p>
-          <a:p>
-            <a:pPr algn="l" indent="0" marL="0">
-              <a:spcAft>
-                <a:spcPts val="800"/>
-              </a:spcAft>
-              <a:buNone/>
-            </a:pPr>
-            <a:r>
-              <a:rPr lang="en-US" sz="4000" b="1" dirty="0">
-                <a:solidFill>
-                  <a:srgbClr val="111111"/>
-                </a:solidFill>
-                <a:latin typeface="Times New Roman" pitchFamily="34" charset="0"/>
-                <a:ea typeface="Times New Roman" pitchFamily="34" charset="-122"/>
-                <a:cs typeface="Times New Roman" pitchFamily="34" charset="-120"/>
-              </a:rPr>
-              <a:t>Incentives: </a:t>
-            </a:r>
-            <a:pPr algn="l" indent="0" marL="0">
-              <a:spcAft>
-                <a:spcPts val="800"/>
-              </a:spcAft>
-              <a:buNone/>
-            </a:pPr>
-            <a:r>
-              <a:rPr lang="en-US" sz="4000" dirty="0">
-                <a:solidFill>
-                  <a:srgbClr val="111111"/>
-                </a:solidFill>
-                <a:latin typeface="Times New Roman" pitchFamily="34" charset="0"/>
-                <a:ea typeface="Times New Roman" pitchFamily="34" charset="-122"/>
-                <a:cs typeface="Times New Roman" pitchFamily="34" charset="-120"/>
-              </a:rPr>
-              <a:t>It gives tax advantages to investors and creates industrial zones.</a:t>
-            </a:r>
-            <a:endParaRPr lang="en-US" sz="4000" dirty="0"/>
+              <a:t>Illustration: industrial regions of Cameroon</a:t>
+            </a:r>
+            <a:endParaRPr lang="en-US" sz="1800" dirty="0"/>
           </a:p>
         </p:txBody>
       </p:sp>
@@ -15083,7 +15627,7 @@
         <p:spPr>
           <a:xfrm>
             <a:off x="0" y="658368"/>
-            <a:ext cx="5120640" cy="5833872"/>
+            <a:ext cx="2468880" cy="5833872"/>
           </a:xfrm>
           <a:prstGeom prst="rect">
             <a:avLst/>
@@ -15098,8 +15642,8 @@
         </p:nvSpPr>
         <p:spPr>
           <a:xfrm>
-            <a:off x="5349240" y="1005840"/>
-            <a:ext cx="6522415" cy="731520"/>
+            <a:off x="2697480" y="1005840"/>
+            <a:ext cx="9174175" cy="731520"/>
           </a:xfrm>
           <a:prstGeom prst="rect">
             <a:avLst/>
@@ -15125,7 +15669,7 @@
                 <a:ea typeface="Times New Roman" pitchFamily="34" charset="-122"/>
                 <a:cs typeface="Times New Roman" pitchFamily="34" charset="-120"/>
               </a:rPr>
-              <a:t>3. Government Efforts (continued)</a:t>
+              <a:t>2. Importance and Problems</a:t>
             </a:r>
             <a:endParaRPr lang="en-US" sz="3600" dirty="0"/>
           </a:p>
@@ -15139,8 +15683,47 @@
         </p:nvSpPr>
         <p:spPr>
           <a:xfrm>
-            <a:off x="5349240" y="1783080"/>
-            <a:ext cx="6522415" cy="4663440"/>
+            <a:off x="2697480" y="1737360"/>
+            <a:ext cx="9174175" cy="457200"/>
+          </a:xfrm>
+          <a:prstGeom prst="rect">
+            <a:avLst/>
+          </a:prstGeom>
+          <a:noFill/>
+          <a:ln/>
+        </p:spPr>
+        <p:txBody>
+          <a:bodyPr wrap="square" lIns="0" tIns="0" rIns="0" bIns="0" rtlCol="0" anchor="ctr"/>
+          <a:lstStyle/>
+          <a:p>
+            <a:pPr algn="l" indent="0" marL="0">
+              <a:buNone/>
+            </a:pPr>
+            <a:r>
+              <a:rPr lang="en-US" sz="3200" b="1" dirty="0">
+                <a:solidFill>
+                  <a:srgbClr val="990011"/>
+                </a:solidFill>
+                <a:latin typeface="Times New Roman" pitchFamily="34" charset="0"/>
+                <a:ea typeface="Times New Roman" pitchFamily="34" charset="-122"/>
+                <a:cs typeface="Times New Roman" pitchFamily="34" charset="-120"/>
+              </a:rPr>
+              <a:t>A) Importance</a:t>
+            </a:r>
+            <a:endParaRPr lang="en-US" sz="3200" dirty="0"/>
+          </a:p>
+        </p:txBody>
+      </p:sp>
+      <p:sp>
+        <p:nvSpPr>
+          <p:cNvPr id="6" name="Text 3"/>
+          <p:cNvSpPr/>
+          <p:nvPr/>
+        </p:nvSpPr>
+        <p:spPr>
+          <a:xfrm>
+            <a:off x="2697480" y="2240280"/>
+            <a:ext cx="9174175" cy="4206240"/>
           </a:xfrm>
           <a:prstGeom prst="rect">
             <a:avLst/>
@@ -15159,7 +15742,7 @@
               <a:buNone/>
             </a:pPr>
             <a:r>
-              <a:rPr lang="en-US" sz="4000" b="1" dirty="0">
+              <a:rPr lang="en-US" sz="4000" i="1" dirty="0">
                 <a:solidFill>
                   <a:srgbClr val="111111"/>
                 </a:solidFill>
@@ -15167,8 +15750,11 @@
                 <a:ea typeface="Times New Roman" pitchFamily="34" charset="-122"/>
                 <a:cs typeface="Times New Roman" pitchFamily="34" charset="-120"/>
               </a:rPr>
-              <a:t>Policy: </a:t>
-            </a:r>
+              <a:t>Industries are important for the following reasons:</a:t>
+            </a:r>
+            <a:endParaRPr lang="en-US" sz="4000" dirty="0"/>
+          </a:p>
+          <a:p>
             <a:pPr algn="l" indent="0" marL="0">
               <a:spcAft>
                 <a:spcPts val="800"/>
@@ -15176,7 +15762,7 @@
               <a:buNone/>
             </a:pPr>
             <a:r>
-              <a:rPr lang="en-US" sz="4000" dirty="0">
+              <a:rPr lang="en-US" sz="4000" b="1" dirty="0">
                 <a:solidFill>
                   <a:srgbClr val="111111"/>
                 </a:solidFill>
@@ -15184,7 +15770,61 @@
                 <a:ea typeface="Times New Roman" pitchFamily="34" charset="-122"/>
                 <a:cs typeface="Times New Roman" pitchFamily="34" charset="-120"/>
               </a:rPr>
-              <a:t>It promotes local processing and import substitution for Vision 2035.</a:t>
+              <a:t>Jobs: </a:t>
+            </a:r>
+            <a:pPr algn="l" indent="0" marL="0">
+              <a:spcAft>
+                <a:spcPts val="800"/>
+              </a:spcAft>
+              <a:buNone/>
+            </a:pPr>
+            <a:r>
+              <a:rPr lang="en-US" sz="4000" dirty="0">
+                <a:solidFill>
+                  <a:srgbClr val="111111"/>
+                </a:solidFill>
+                <a:latin typeface="Times New Roman" pitchFamily="34" charset="0"/>
+                <a:ea typeface="Times New Roman" pitchFamily="34" charset="-122"/>
+                <a:cs typeface="Times New Roman" pitchFamily="34" charset="-120"/>
+              </a:rPr>
+              <a:t>Factories employ many workers.</a:t>
+            </a:r>
+            <a:endParaRPr lang="en-US" sz="4000" dirty="0"/>
+          </a:p>
+          <a:p>
+            <a:pPr algn="l" indent="0" marL="0">
+              <a:spcAft>
+                <a:spcPts val="800"/>
+              </a:spcAft>
+              <a:buNone/>
+            </a:pPr>
+            <a:r>
+              <a:rPr lang="en-US" sz="4000" b="1" dirty="0">
+                <a:solidFill>
+                  <a:srgbClr val="111111"/>
+                </a:solidFill>
+                <a:latin typeface="Times New Roman" pitchFamily="34" charset="0"/>
+                <a:ea typeface="Times New Roman" pitchFamily="34" charset="-122"/>
+                <a:cs typeface="Times New Roman" pitchFamily="34" charset="-120"/>
+              </a:rPr>
+              <a:t>Added value: </a:t>
+            </a:r>
+            <a:pPr algn="l" indent="0" marL="0">
+              <a:spcAft>
+                <a:spcPts val="800"/>
+              </a:spcAft>
+              <a:buNone/>
+            </a:pPr>
+            <a:r>
+              <a:rPr lang="en-US" sz="4000" dirty="0">
+                <a:solidFill>
+                  <a:srgbClr val="111111"/>
+                </a:solidFill>
+                <a:latin typeface="Times New Roman" pitchFamily="34" charset="0"/>
+                <a:ea typeface="Times New Roman" pitchFamily="34" charset="-122"/>
+                <a:cs typeface="Times New Roman" pitchFamily="34" charset="-120"/>
+              </a:rPr>
+              <a:t>Raw materials are sold at a higher price after processing.</a:t>
             </a:r>
             <a:endParaRPr lang="en-US" sz="4000" dirty="0"/>
           </a:p>
@@ -15296,7 +15936,7 @@
                 <a:ea typeface="Calibri" pitchFamily="34" charset="-122"/>
                 <a:cs typeface="Calibri" pitchFamily="34" charset="-120"/>
               </a:rPr>
-              <a:t>FORMATIVE EVALUATION</a:t>
+              <a:t>BOARD SUMMARY</a:t>
             </a:r>
             <a:endParaRPr lang="en-US" sz="1400" dirty="0"/>
           </a:p>
@@ -15361,7 +16001,7 @@
                 <a:ea typeface="Times New Roman" pitchFamily="34" charset="-122"/>
                 <a:cs typeface="Times New Roman" pitchFamily="34" charset="-120"/>
               </a:rPr>
-              <a:t>Evaluation 1</a:t>
+              <a:t>2. Importance and Problems</a:t>
             </a:r>
             <a:endParaRPr lang="en-US" sz="3600" dirty="0"/>
           </a:p>
@@ -15375,8 +16015,47 @@
         </p:nvSpPr>
         <p:spPr>
           <a:xfrm>
-            <a:off x="5349240" y="1783080"/>
-            <a:ext cx="6522415" cy="4663440"/>
+            <a:off x="5349240" y="1737360"/>
+            <a:ext cx="6522415" cy="457200"/>
+          </a:xfrm>
+          <a:prstGeom prst="rect">
+            <a:avLst/>
+          </a:prstGeom>
+          <a:noFill/>
+          <a:ln/>
+        </p:spPr>
+        <p:txBody>
+          <a:bodyPr wrap="square" lIns="0" tIns="0" rIns="0" bIns="0" rtlCol="0" anchor="ctr"/>
+          <a:lstStyle/>
+          <a:p>
+            <a:pPr algn="l" indent="0" marL="0">
+              <a:buNone/>
+            </a:pPr>
+            <a:r>
+              <a:rPr lang="en-US" sz="3200" b="1" dirty="0">
+                <a:solidFill>
+                  <a:srgbClr val="990011"/>
+                </a:solidFill>
+                <a:latin typeface="Times New Roman" pitchFamily="34" charset="0"/>
+                <a:ea typeface="Times New Roman" pitchFamily="34" charset="-122"/>
+                <a:cs typeface="Times New Roman" pitchFamily="34" charset="-120"/>
+              </a:rPr>
+              <a:t>A) Importance (continued)</a:t>
+            </a:r>
+            <a:endParaRPr lang="en-US" sz="3200" dirty="0"/>
+          </a:p>
+        </p:txBody>
+      </p:sp>
+      <p:sp>
+        <p:nvSpPr>
+          <p:cNvPr id="6" name="Text 3"/>
+          <p:cNvSpPr/>
+          <p:nvPr/>
+        </p:nvSpPr>
+        <p:spPr>
+          <a:xfrm>
+            <a:off x="5349240" y="2240280"/>
+            <a:ext cx="6522415" cy="4206240"/>
           </a:xfrm>
           <a:prstGeom prst="rect">
             <a:avLst/>
@@ -15395,7 +16074,7 @@
               <a:buNone/>
             </a:pPr>
             <a:r>
-              <a:rPr lang="en-US" sz="4000" dirty="0">
+              <a:rPr lang="en-US" sz="4000" b="1" dirty="0">
                 <a:solidFill>
                   <a:srgbClr val="111111"/>
                 </a:solidFill>
@@ -15403,7 +16082,24 @@
                 <a:ea typeface="Times New Roman" pitchFamily="34" charset="-122"/>
                 <a:cs typeface="Times New Roman" pitchFamily="34" charset="-120"/>
               </a:rPr>
-              <a:t>Name three industries of Cameroon and their towns.</a:t>
+              <a:t>Fewer imports: </a:t>
+            </a:r>
+            <a:pPr algn="l" indent="0" marL="0">
+              <a:spcAft>
+                <a:spcPts val="800"/>
+              </a:spcAft>
+              <a:buNone/>
+            </a:pPr>
+            <a:r>
+              <a:rPr lang="en-US" sz="4000" dirty="0">
+                <a:solidFill>
+                  <a:srgbClr val="111111"/>
+                </a:solidFill>
+                <a:latin typeface="Times New Roman" pitchFamily="34" charset="0"/>
+                <a:ea typeface="Times New Roman" pitchFamily="34" charset="-122"/>
+                <a:cs typeface="Times New Roman" pitchFamily="34" charset="-120"/>
+              </a:rPr>
+              <a:t>Goods made locally replace imported goods.</a:t>
             </a:r>
             <a:endParaRPr lang="en-US" sz="4000" dirty="0"/>
           </a:p>
@@ -15515,7 +16211,7 @@
                 <a:ea typeface="Calibri" pitchFamily="34" charset="-122"/>
                 <a:cs typeface="Calibri" pitchFamily="34" charset="-120"/>
               </a:rPr>
-              <a:t>FORMATIVE EVALUATION</a:t>
+              <a:t>BOARD SUMMARY</a:t>
             </a:r>
             <a:endParaRPr lang="en-US" sz="1400" dirty="0"/>
           </a:p>
@@ -15538,7 +16234,7 @@
         <p:spPr>
           <a:xfrm>
             <a:off x="0" y="658368"/>
-            <a:ext cx="5120640" cy="5833872"/>
+            <a:ext cx="3840480" cy="5833872"/>
           </a:xfrm>
           <a:prstGeom prst="rect">
             <a:avLst/>
@@ -15553,8 +16249,8 @@
         </p:nvSpPr>
         <p:spPr>
           <a:xfrm>
-            <a:off x="5349240" y="1005840"/>
-            <a:ext cx="6522415" cy="731520"/>
+            <a:off x="4069080" y="1005840"/>
+            <a:ext cx="7802575" cy="731520"/>
           </a:xfrm>
           <a:prstGeom prst="rect">
             <a:avLst/>
@@ -15580,7 +16276,7 @@
                 <a:ea typeface="Times New Roman" pitchFamily="34" charset="-122"/>
                 <a:cs typeface="Times New Roman" pitchFamily="34" charset="-120"/>
               </a:rPr>
-              <a:t>Expected Answer</a:t>
+              <a:t>2. Importance and Problems</a:t>
             </a:r>
             <a:endParaRPr lang="en-US" sz="3600" dirty="0"/>
           </a:p>
@@ -15594,8 +16290,47 @@
         </p:nvSpPr>
         <p:spPr>
           <a:xfrm>
-            <a:off x="5349240" y="1783080"/>
-            <a:ext cx="6522415" cy="4663440"/>
+            <a:off x="4069080" y="1737360"/>
+            <a:ext cx="7802575" cy="457200"/>
+          </a:xfrm>
+          <a:prstGeom prst="rect">
+            <a:avLst/>
+          </a:prstGeom>
+          <a:noFill/>
+          <a:ln/>
+        </p:spPr>
+        <p:txBody>
+          <a:bodyPr wrap="square" lIns="0" tIns="0" rIns="0" bIns="0" rtlCol="0" anchor="ctr"/>
+          <a:lstStyle/>
+          <a:p>
+            <a:pPr algn="l" indent="0" marL="0">
+              <a:buNone/>
+            </a:pPr>
+            <a:r>
+              <a:rPr lang="en-US" sz="3200" b="1" dirty="0">
+                <a:solidFill>
+                  <a:srgbClr val="990011"/>
+                </a:solidFill>
+                <a:latin typeface="Times New Roman" pitchFamily="34" charset="0"/>
+                <a:ea typeface="Times New Roman" pitchFamily="34" charset="-122"/>
+                <a:cs typeface="Times New Roman" pitchFamily="34" charset="-120"/>
+              </a:rPr>
+              <a:t>B) Problems</a:t>
+            </a:r>
+            <a:endParaRPr lang="en-US" sz="3200" dirty="0"/>
+          </a:p>
+        </p:txBody>
+      </p:sp>
+      <p:sp>
+        <p:nvSpPr>
+          <p:cNvPr id="6" name="Text 3"/>
+          <p:cNvSpPr/>
+          <p:nvPr/>
+        </p:nvSpPr>
+        <p:spPr>
+          <a:xfrm>
+            <a:off x="4069080" y="2240280"/>
+            <a:ext cx="7802575" cy="4206240"/>
           </a:xfrm>
           <a:prstGeom prst="rect">
             <a:avLst/>
@@ -15614,7 +16349,7 @@
               <a:buNone/>
             </a:pPr>
             <a:r>
-              <a:rPr lang="en-US" sz="4000" dirty="0">
+              <a:rPr lang="en-US" sz="4000" i="1" dirty="0">
                 <a:solidFill>
                   <a:srgbClr val="111111"/>
                 </a:solidFill>
@@ -15622,7 +16357,81 @@
                 <a:ea typeface="Times New Roman" pitchFamily="34" charset="-122"/>
                 <a:cs typeface="Times New Roman" pitchFamily="34" charset="-120"/>
               </a:rPr>
-              <a:t>ALUCAM (Edéa), CICAM (Garoua), SONARA (Limbe).</a:t>
+              <a:t>Industries face the following problems:</a:t>
+            </a:r>
+            <a:endParaRPr lang="en-US" sz="4000" dirty="0"/>
+          </a:p>
+          <a:p>
+            <a:pPr algn="l" indent="0" marL="0">
+              <a:spcAft>
+                <a:spcPts val="800"/>
+              </a:spcAft>
+              <a:buNone/>
+            </a:pPr>
+            <a:r>
+              <a:rPr lang="en-US" sz="4000" b="1" dirty="0">
+                <a:solidFill>
+                  <a:srgbClr val="111111"/>
+                </a:solidFill>
+                <a:latin typeface="Times New Roman" pitchFamily="34" charset="0"/>
+                <a:ea typeface="Times New Roman" pitchFamily="34" charset="-122"/>
+                <a:cs typeface="Times New Roman" pitchFamily="34" charset="-120"/>
+              </a:rPr>
+              <a:t>Power cuts: </a:t>
+            </a:r>
+            <a:pPr algn="l" indent="0" marL="0">
+              <a:spcAft>
+                <a:spcPts val="800"/>
+              </a:spcAft>
+              <a:buNone/>
+            </a:pPr>
+            <a:r>
+              <a:rPr lang="en-US" sz="4000" dirty="0">
+                <a:solidFill>
+                  <a:srgbClr val="111111"/>
+                </a:solidFill>
+                <a:latin typeface="Times New Roman" pitchFamily="34" charset="0"/>
+                <a:ea typeface="Times New Roman" pitchFamily="34" charset="-122"/>
+                <a:cs typeface="Times New Roman" pitchFamily="34" charset="-120"/>
+              </a:rPr>
+              <a:t>Machines stop when there is no electricity.</a:t>
+            </a:r>
+            <a:endParaRPr lang="en-US" sz="4000" dirty="0"/>
+          </a:p>
+          <a:p>
+            <a:pPr algn="l" indent="0" marL="0">
+              <a:spcAft>
+                <a:spcPts val="800"/>
+              </a:spcAft>
+              <a:buNone/>
+            </a:pPr>
+            <a:r>
+              <a:rPr lang="en-US" sz="4000" b="1" dirty="0">
+                <a:solidFill>
+                  <a:srgbClr val="111111"/>
+                </a:solidFill>
+                <a:latin typeface="Times New Roman" pitchFamily="34" charset="0"/>
+                <a:ea typeface="Times New Roman" pitchFamily="34" charset="-122"/>
+                <a:cs typeface="Times New Roman" pitchFamily="34" charset="-120"/>
+              </a:rPr>
+              <a:t>Lack of capital: </a:t>
+            </a:r>
+            <a:pPr algn="l" indent="0" marL="0">
+              <a:spcAft>
+                <a:spcPts val="800"/>
+              </a:spcAft>
+              <a:buNone/>
+            </a:pPr>
+            <a:r>
+              <a:rPr lang="en-US" sz="4000" dirty="0">
+                <a:solidFill>
+                  <a:srgbClr val="111111"/>
+                </a:solidFill>
+                <a:latin typeface="Times New Roman" pitchFamily="34" charset="0"/>
+                <a:ea typeface="Times New Roman" pitchFamily="34" charset="-122"/>
+                <a:cs typeface="Times New Roman" pitchFamily="34" charset="-120"/>
+              </a:rPr>
+              <a:t>Investors have little money.</a:t>
             </a:r>
             <a:endParaRPr lang="en-US" sz="4000" dirty="0"/>
           </a:p>
@@ -15734,7 +16543,7 @@
                 <a:ea typeface="Calibri" pitchFamily="34" charset="-122"/>
                 <a:cs typeface="Calibri" pitchFamily="34" charset="-120"/>
               </a:rPr>
-              <a:t>FORMATIVE EVALUATION</a:t>
+              <a:t>BOARD SUMMARY</a:t>
             </a:r>
             <a:endParaRPr lang="en-US" sz="1400" dirty="0"/>
           </a:p>
@@ -15799,7 +16608,7 @@
                 <a:ea typeface="Times New Roman" pitchFamily="34" charset="-122"/>
                 <a:cs typeface="Times New Roman" pitchFamily="34" charset="-120"/>
               </a:rPr>
-              <a:t>Evaluation 2</a:t>
+              <a:t>2. Importance and Problems</a:t>
             </a:r>
             <a:endParaRPr lang="en-US" sz="3600" dirty="0"/>
           </a:p>
@@ -15813,8 +16622,47 @@
         </p:nvSpPr>
         <p:spPr>
           <a:xfrm>
-            <a:off x="5349240" y="1783080"/>
-            <a:ext cx="6522415" cy="4663440"/>
+            <a:off x="5349240" y="1737360"/>
+            <a:ext cx="6522415" cy="457200"/>
+          </a:xfrm>
+          <a:prstGeom prst="rect">
+            <a:avLst/>
+          </a:prstGeom>
+          <a:noFill/>
+          <a:ln/>
+        </p:spPr>
+        <p:txBody>
+          <a:bodyPr wrap="square" lIns="0" tIns="0" rIns="0" bIns="0" rtlCol="0" anchor="ctr"/>
+          <a:lstStyle/>
+          <a:p>
+            <a:pPr algn="l" indent="0" marL="0">
+              <a:buNone/>
+            </a:pPr>
+            <a:r>
+              <a:rPr lang="en-US" sz="3200" b="1" dirty="0">
+                <a:solidFill>
+                  <a:srgbClr val="990011"/>
+                </a:solidFill>
+                <a:latin typeface="Times New Roman" pitchFamily="34" charset="0"/>
+                <a:ea typeface="Times New Roman" pitchFamily="34" charset="-122"/>
+                <a:cs typeface="Times New Roman" pitchFamily="34" charset="-120"/>
+              </a:rPr>
+              <a:t>B) Problems (continued)</a:t>
+            </a:r>
+            <a:endParaRPr lang="en-US" sz="3200" dirty="0"/>
+          </a:p>
+        </p:txBody>
+      </p:sp>
+      <p:sp>
+        <p:nvSpPr>
+          <p:cNvPr id="6" name="Text 3"/>
+          <p:cNvSpPr/>
+          <p:nvPr/>
+        </p:nvSpPr>
+        <p:spPr>
+          <a:xfrm>
+            <a:off x="5349240" y="2240280"/>
+            <a:ext cx="6522415" cy="4206240"/>
           </a:xfrm>
           <a:prstGeom prst="rect">
             <a:avLst/>
@@ -15833,7 +16681,7 @@
               <a:buNone/>
             </a:pPr>
             <a:r>
-              <a:rPr lang="en-US" sz="4000" dirty="0">
+              <a:rPr lang="en-US" sz="4000" b="1" dirty="0">
                 <a:solidFill>
                   <a:srgbClr val="111111"/>
                 </a:solidFill>
@@ -15841,7 +16689,61 @@
                 <a:ea typeface="Times New Roman" pitchFamily="34" charset="-122"/>
                 <a:cs typeface="Times New Roman" pitchFamily="34" charset="-120"/>
               </a:rPr>
-              <a:t>Give two problems of industry in Cameroon.</a:t>
+              <a:t>Poor roads and high taxes: </a:t>
+            </a:r>
+            <a:pPr algn="l" indent="0" marL="0">
+              <a:spcAft>
+                <a:spcPts val="800"/>
+              </a:spcAft>
+              <a:buNone/>
+            </a:pPr>
+            <a:r>
+              <a:rPr lang="en-US" sz="4000" dirty="0">
+                <a:solidFill>
+                  <a:srgbClr val="111111"/>
+                </a:solidFill>
+                <a:latin typeface="Times New Roman" pitchFamily="34" charset="0"/>
+                <a:ea typeface="Times New Roman" pitchFamily="34" charset="-122"/>
+                <a:cs typeface="Times New Roman" pitchFamily="34" charset="-120"/>
+              </a:rPr>
+              <a:t>They raise production costs.</a:t>
+            </a:r>
+            <a:endParaRPr lang="en-US" sz="4000" dirty="0"/>
+          </a:p>
+          <a:p>
+            <a:pPr algn="l" indent="0" marL="0">
+              <a:spcAft>
+                <a:spcPts val="800"/>
+              </a:spcAft>
+              <a:buNone/>
+            </a:pPr>
+            <a:r>
+              <a:rPr lang="en-US" sz="4000" b="1" dirty="0">
+                <a:solidFill>
+                  <a:srgbClr val="111111"/>
+                </a:solidFill>
+                <a:latin typeface="Times New Roman" pitchFamily="34" charset="0"/>
+                <a:ea typeface="Times New Roman" pitchFamily="34" charset="-122"/>
+                <a:cs typeface="Times New Roman" pitchFamily="34" charset="-120"/>
+              </a:rPr>
+              <a:t>Competition from imports: </a:t>
+            </a:r>
+            <a:pPr algn="l" indent="0" marL="0">
+              <a:spcAft>
+                <a:spcPts val="800"/>
+              </a:spcAft>
+              <a:buNone/>
+            </a:pPr>
+            <a:r>
+              <a:rPr lang="en-US" sz="4000" dirty="0">
+                <a:solidFill>
+                  <a:srgbClr val="111111"/>
+                </a:solidFill>
+                <a:latin typeface="Times New Roman" pitchFamily="34" charset="0"/>
+                <a:ea typeface="Times New Roman" pitchFamily="34" charset="-122"/>
+                <a:cs typeface="Times New Roman" pitchFamily="34" charset="-120"/>
+              </a:rPr>
+              <a:t>Cheap foreign goods are preferred.</a:t>
             </a:r>
             <a:endParaRPr lang="en-US" sz="4000" dirty="0"/>
           </a:p>
@@ -15953,7 +16855,7 @@
                 <a:ea typeface="Calibri" pitchFamily="34" charset="-122"/>
                 <a:cs typeface="Calibri" pitchFamily="34" charset="-120"/>
               </a:rPr>
-              <a:t>FORMATIVE EVALUATION</a:t>
+              <a:t>BOARD SUMMARY</a:t>
             </a:r>
             <a:endParaRPr lang="en-US" sz="1400" dirty="0"/>
           </a:p>
@@ -15976,7 +16878,7 @@
         <p:spPr>
           <a:xfrm>
             <a:off x="0" y="658368"/>
-            <a:ext cx="5120640" cy="5833872"/>
+            <a:ext cx="3840480" cy="5833872"/>
           </a:xfrm>
           <a:prstGeom prst="rect">
             <a:avLst/>
@@ -15991,8 +16893,8 @@
         </p:nvSpPr>
         <p:spPr>
           <a:xfrm>
-            <a:off x="5349240" y="1005840"/>
-            <a:ext cx="6522415" cy="731520"/>
+            <a:off x="4069080" y="1005840"/>
+            <a:ext cx="7802575" cy="731520"/>
           </a:xfrm>
           <a:prstGeom prst="rect">
             <a:avLst/>
@@ -16018,7 +16920,7 @@
                 <a:ea typeface="Times New Roman" pitchFamily="34" charset="-122"/>
                 <a:cs typeface="Times New Roman" pitchFamily="34" charset="-120"/>
               </a:rPr>
-              <a:t>Expected Answer</a:t>
+              <a:t>3. Government Efforts</a:t>
             </a:r>
             <a:endParaRPr lang="en-US" sz="3600" dirty="0"/>
           </a:p>
@@ -16032,8 +16934,8 @@
         </p:nvSpPr>
         <p:spPr>
           <a:xfrm>
-            <a:off x="5349240" y="1783080"/>
-            <a:ext cx="6522415" cy="4663440"/>
+            <a:off x="4069080" y="1783080"/>
+            <a:ext cx="7802575" cy="4663440"/>
           </a:xfrm>
           <a:prstGeom prst="rect">
             <a:avLst/>
@@ -16052,7 +16954,7 @@
               <a:buNone/>
             </a:pPr>
             <a:r>
-              <a:rPr lang="en-US" sz="4000" dirty="0">
+              <a:rPr lang="en-US" sz="4000" i="1" dirty="0">
                 <a:solidFill>
                   <a:srgbClr val="111111"/>
                 </a:solidFill>
@@ -16060,7 +16962,81 @@
                 <a:ea typeface="Times New Roman" pitchFamily="34" charset="-122"/>
                 <a:cs typeface="Times New Roman" pitchFamily="34" charset="-120"/>
               </a:rPr>
-              <a:t>Power cuts and competition from imports.</a:t>
+              <a:t>The government boosts industrialisation as follows:</a:t>
+            </a:r>
+            <a:endParaRPr lang="en-US" sz="4000" dirty="0"/>
+          </a:p>
+          <a:p>
+            <a:pPr algn="l" indent="0" marL="0">
+              <a:spcAft>
+                <a:spcPts val="800"/>
+              </a:spcAft>
+              <a:buNone/>
+            </a:pPr>
+            <a:r>
+              <a:rPr lang="en-US" sz="4000" b="1" dirty="0">
+                <a:solidFill>
+                  <a:srgbClr val="111111"/>
+                </a:solidFill>
+                <a:latin typeface="Times New Roman" pitchFamily="34" charset="0"/>
+                <a:ea typeface="Times New Roman" pitchFamily="34" charset="-122"/>
+                <a:cs typeface="Times New Roman" pitchFamily="34" charset="-120"/>
+              </a:rPr>
+              <a:t>Infrastructure: </a:t>
+            </a:r>
+            <a:pPr algn="l" indent="0" marL="0">
+              <a:spcAft>
+                <a:spcPts val="800"/>
+              </a:spcAft>
+              <a:buNone/>
+            </a:pPr>
+            <a:r>
+              <a:rPr lang="en-US" sz="4000" dirty="0">
+                <a:solidFill>
+                  <a:srgbClr val="111111"/>
+                </a:solidFill>
+                <a:latin typeface="Times New Roman" pitchFamily="34" charset="0"/>
+                <a:ea typeface="Times New Roman" pitchFamily="34" charset="-122"/>
+                <a:cs typeface="Times New Roman" pitchFamily="34" charset="-120"/>
+              </a:rPr>
+              <a:t>It builds dams, roads and the Kribi deep-sea port.</a:t>
+            </a:r>
+            <a:endParaRPr lang="en-US" sz="4000" dirty="0"/>
+          </a:p>
+          <a:p>
+            <a:pPr algn="l" indent="0" marL="0">
+              <a:spcAft>
+                <a:spcPts val="800"/>
+              </a:spcAft>
+              <a:buNone/>
+            </a:pPr>
+            <a:r>
+              <a:rPr lang="en-US" sz="4000" b="1" dirty="0">
+                <a:solidFill>
+                  <a:srgbClr val="111111"/>
+                </a:solidFill>
+                <a:latin typeface="Times New Roman" pitchFamily="34" charset="0"/>
+                <a:ea typeface="Times New Roman" pitchFamily="34" charset="-122"/>
+                <a:cs typeface="Times New Roman" pitchFamily="34" charset="-120"/>
+              </a:rPr>
+              <a:t>Incentives: </a:t>
+            </a:r>
+            <a:pPr algn="l" indent="0" marL="0">
+              <a:spcAft>
+                <a:spcPts val="800"/>
+              </a:spcAft>
+              <a:buNone/>
+            </a:pPr>
+            <a:r>
+              <a:rPr lang="en-US" sz="4000" dirty="0">
+                <a:solidFill>
+                  <a:srgbClr val="111111"/>
+                </a:solidFill>
+                <a:latin typeface="Times New Roman" pitchFamily="34" charset="0"/>
+                <a:ea typeface="Times New Roman" pitchFamily="34" charset="-122"/>
+                <a:cs typeface="Times New Roman" pitchFamily="34" charset="-120"/>
+              </a:rPr>
+              <a:t>It gives tax advantages to investors and creates industrial zones.</a:t>
             </a:r>
             <a:endParaRPr lang="en-US" sz="4000" dirty="0"/>
           </a:p>
@@ -16172,7 +17148,7 @@
                 <a:ea typeface="Calibri" pitchFamily="34" charset="-122"/>
                 <a:cs typeface="Calibri" pitchFamily="34" charset="-120"/>
               </a:rPr>
-              <a:t>REMEDIATION</a:t>
+              <a:t>BOARD SUMMARY</a:t>
             </a:r>
             <a:endParaRPr lang="en-US" sz="1400" dirty="0"/>
           </a:p>
@@ -16195,7 +17171,7 @@
         <p:spPr>
           <a:xfrm>
             <a:off x="0" y="658368"/>
-            <a:ext cx="3840480" cy="5833872"/>
+            <a:ext cx="5120640" cy="5833872"/>
           </a:xfrm>
           <a:prstGeom prst="rect">
             <a:avLst/>
@@ -16210,8 +17186,8 @@
         </p:nvSpPr>
         <p:spPr>
           <a:xfrm>
-            <a:off x="4069080" y="1005840"/>
-            <a:ext cx="7802575" cy="731520"/>
+            <a:off x="5349240" y="1005840"/>
+            <a:ext cx="6522415" cy="731520"/>
           </a:xfrm>
           <a:prstGeom prst="rect">
             <a:avLst/>
@@ -16237,7 +17213,7 @@
                 <a:ea typeface="Times New Roman" pitchFamily="34" charset="-122"/>
                 <a:cs typeface="Times New Roman" pitchFamily="34" charset="-120"/>
               </a:rPr>
-              <a:t>Remediation</a:t>
+              <a:t>3. Government Efforts (continued)</a:t>
             </a:r>
             <a:endParaRPr lang="en-US" sz="3600" dirty="0"/>
           </a:p>
@@ -16251,8 +17227,8 @@
         </p:nvSpPr>
         <p:spPr>
           <a:xfrm>
-            <a:off x="4069080" y="1783080"/>
-            <a:ext cx="7802575" cy="4663440"/>
+            <a:off x="5349240" y="1783080"/>
+            <a:ext cx="6522415" cy="4663440"/>
           </a:xfrm>
           <a:prstGeom prst="rect">
             <a:avLst/>
@@ -16279,18 +17255,13 @@
                 <a:ea typeface="Times New Roman" pitchFamily="34" charset="-122"/>
                 <a:cs typeface="Times New Roman" pitchFamily="34" charset="-120"/>
               </a:rPr>
-              <a:t>Fill in the blanks:</a:t>
-            </a:r>
-            <a:endParaRPr lang="en-US" sz="4000" dirty="0"/>
-          </a:p>
-          <a:p>
-            <a:pPr algn="l" marL="342900" indent="-342900">
+              <a:t>Policy: </a:t>
+            </a:r>
+            <a:pPr algn="l" indent="0" marL="0">
               <a:spcAft>
                 <a:spcPts val="800"/>
               </a:spcAft>
-              <a:buSzPct val="100000"/>
-              <a:buFont typeface="+mj-lt"/>
-              <a:buAutoNum type="arabicPeriod" startAt="1"/>
+              <a:buNone/>
             </a:pPr>
             <a:r>
               <a:rPr lang="en-US" sz="4000" dirty="0">
@@ -16301,51 +17272,7 @@
                 <a:ea typeface="Times New Roman" pitchFamily="34" charset="-122"/>
                 <a:cs typeface="Times New Roman" pitchFamily="34" charset="-120"/>
               </a:rPr>
-              <a:t>Aluminium is made at ______.</a:t>
-            </a:r>
-            <a:endParaRPr lang="en-US" sz="4000" dirty="0"/>
-          </a:p>
-          <a:p>
-            <a:pPr algn="l" marL="342900" indent="-342900">
-              <a:spcAft>
-                <a:spcPts val="800"/>
-              </a:spcAft>
-              <a:buSzPct val="100000"/>
-              <a:buFont typeface="+mj-lt"/>
-              <a:buAutoNum type="arabicPeriod" startAt="1"/>
-            </a:pPr>
-            <a:r>
-              <a:rPr lang="en-US" sz="4000" dirty="0">
-                <a:solidFill>
-                  <a:srgbClr val="111111"/>
-                </a:solidFill>
-                <a:latin typeface="Times New Roman" pitchFamily="34" charset="0"/>
-                <a:ea typeface="Times New Roman" pitchFamily="34" charset="-122"/>
-                <a:cs typeface="Times New Roman" pitchFamily="34" charset="-120"/>
-              </a:rPr>
-              <a:t>The oil refinery is at ______.</a:t>
-            </a:r>
-            <a:endParaRPr lang="en-US" sz="4000" dirty="0"/>
-          </a:p>
-          <a:p>
-            <a:pPr algn="l" marL="342900" indent="-342900">
-              <a:spcAft>
-                <a:spcPts val="800"/>
-              </a:spcAft>
-              <a:buSzPct val="100000"/>
-              <a:buFont typeface="+mj-lt"/>
-              <a:buAutoNum type="arabicPeriod" startAt="1"/>
-            </a:pPr>
-            <a:r>
-              <a:rPr lang="en-US" sz="4000" dirty="0">
-                <a:solidFill>
-                  <a:srgbClr val="111111"/>
-                </a:solidFill>
-                <a:latin typeface="Times New Roman" pitchFamily="34" charset="0"/>
-                <a:ea typeface="Times New Roman" pitchFamily="34" charset="-122"/>
-                <a:cs typeface="Times New Roman" pitchFamily="34" charset="-120"/>
-              </a:rPr>
-              <a:t>Cement is made from limestone at ______.</a:t>
+              <a:t>It promotes local processing and import substitution for Vision 2035.</a:t>
             </a:r>
             <a:endParaRPr lang="en-US" sz="4000" dirty="0"/>
           </a:p>
@@ -16457,7 +17384,7 @@
                 <a:ea typeface="Calibri" pitchFamily="34" charset="-122"/>
                 <a:cs typeface="Calibri" pitchFamily="34" charset="-120"/>
               </a:rPr>
-              <a:t>HOMEWORK</a:t>
+              <a:t>FORMATIVE EVALUATION</a:t>
             </a:r>
             <a:endParaRPr lang="en-US" sz="1400" dirty="0"/>
           </a:p>
@@ -16522,7 +17449,7 @@
                 <a:ea typeface="Times New Roman" pitchFamily="34" charset="-122"/>
                 <a:cs typeface="Times New Roman" pitchFamily="34" charset="-120"/>
               </a:rPr>
-              <a:t>Homework</a:t>
+              <a:t>Evaluation 1</a:t>
             </a:r>
             <a:endParaRPr lang="en-US" sz="3600" dirty="0"/>
           </a:p>
@@ -16564,7 +17491,7 @@
                 <a:ea typeface="Times New Roman" pitchFamily="34" charset="-122"/>
                 <a:cs typeface="Times New Roman" pitchFamily="34" charset="-120"/>
               </a:rPr>
-              <a:t>Draw a sketch map of the industrial regions of Cameroon and name two industries in each.</a:t>
+              <a:t>Name three industries of Cameroon and their towns.</a:t>
             </a:r>
             <a:endParaRPr lang="en-US" sz="4000" dirty="0"/>
           </a:p>
@@ -16676,7 +17603,7 @@
                 <a:ea typeface="Calibri" pitchFamily="34" charset="-122"/>
                 <a:cs typeface="Calibri" pitchFamily="34" charset="-120"/>
               </a:rPr>
-              <a:t>NEXT LESSON</a:t>
+              <a:t>FORMATIVE EVALUATION</a:t>
             </a:r>
             <a:endParaRPr lang="en-US" sz="1400" dirty="0"/>
           </a:p>
@@ -16741,7 +17668,7 @@
                 <a:ea typeface="Times New Roman" pitchFamily="34" charset="-122"/>
                 <a:cs typeface="Times New Roman" pitchFamily="34" charset="-120"/>
               </a:rPr>
-              <a:t>Next Lesson</a:t>
+              <a:t>Expected Answer</a:t>
             </a:r>
             <a:endParaRPr lang="en-US" sz="3600" dirty="0"/>
           </a:p>
@@ -16765,17 +17692,17 @@
           <a:ln/>
         </p:spPr>
         <p:txBody>
-          <a:bodyPr wrap="square" lIns="0" tIns="0" rIns="0" bIns="0" rtlCol="0" anchor="ctr"/>
-          <a:lstStyle/>
-          <a:p>
-            <a:pPr algn="ctr" indent="0" marL="0">
+          <a:bodyPr wrap="square" lIns="0" tIns="0" rIns="0" bIns="0" rtlCol="0" anchor="t"/>
+          <a:lstStyle/>
+          <a:p>
+            <a:pPr algn="l" indent="0" marL="0">
               <a:spcAft>
                 <a:spcPts val="800"/>
               </a:spcAft>
               <a:buNone/>
             </a:pPr>
             <a:r>
-              <a:rPr lang="en-US" sz="4000" b="1" dirty="0">
+              <a:rPr lang="en-US" sz="4000" dirty="0">
                 <a:solidFill>
                   <a:srgbClr val="111111"/>
                 </a:solidFill>
@@ -16783,27 +17710,7 @@
                 <a:ea typeface="Times New Roman" pitchFamily="34" charset="-122"/>
                 <a:cs typeface="Times New Roman" pitchFamily="34" charset="-120"/>
               </a:rPr>
-              <a:t>Our next lesson will be on:</a:t>
-            </a:r>
-            <a:endParaRPr lang="en-US" sz="4000" dirty="0"/>
-          </a:p>
-          <a:p>
-            <a:pPr algn="ctr" indent="0" marL="0">
-              <a:spcAft>
-                <a:spcPts val="800"/>
-              </a:spcAft>
-              <a:buNone/>
-            </a:pPr>
-            <a:r>
-              <a:rPr lang="en-US" sz="4000" b="1" dirty="0">
-                <a:solidFill>
-                  <a:srgbClr val="990011"/>
-                </a:solidFill>
-                <a:latin typeface="Times New Roman" pitchFamily="34" charset="0"/>
-                <a:ea typeface="Times New Roman" pitchFamily="34" charset="-122"/>
-                <a:cs typeface="Times New Roman" pitchFamily="34" charset="-120"/>
-              </a:rPr>
-              <a:t>Practical Work 1: Location of Economic Activities and Description of Land Use</a:t>
+              <a:t>ALUCAM (Edéa), CICAM (Garoua), SONARA (Limbe).</a:t>
             </a:r>
             <a:endParaRPr lang="en-US" sz="4000" dirty="0"/>
           </a:p>
@@ -16915,6 +17822,1406 @@
                 <a:ea typeface="Calibri" pitchFamily="34" charset="-122"/>
                 <a:cs typeface="Calibri" pitchFamily="34" charset="-120"/>
               </a:rPr>
+              <a:t>FORMATIVE EVALUATION</a:t>
+            </a:r>
+            <a:endParaRPr lang="en-US" sz="1400" dirty="0"/>
+          </a:p>
+        </p:txBody>
+      </p:sp>
+      <p:pic>
+        <p:nvPicPr>
+          <p:cNvPr id="3" name="Image 0" descr="/home/claude/f4/img/minesec_sheet.png">    </p:cNvPr>
+          <p:cNvPicPr>
+            <a:picLocks noChangeAspect="1"/>
+          </p:cNvPicPr>
+          <p:nvPr/>
+        </p:nvPicPr>
+        <p:blipFill>
+          <a:blip r:embed="rId1"/>
+          <a:stretch>
+            <a:fillRect/>
+          </a:stretch>
+        </p:blipFill>
+        <p:spPr>
+          <a:xfrm>
+            <a:off x="0" y="658368"/>
+            <a:ext cx="5120640" cy="5833872"/>
+          </a:xfrm>
+          <a:prstGeom prst="rect">
+            <a:avLst/>
+          </a:prstGeom>
+        </p:spPr>
+      </p:pic>
+      <p:sp>
+        <p:nvSpPr>
+          <p:cNvPr id="4" name="Text 1"/>
+          <p:cNvSpPr/>
+          <p:nvPr/>
+        </p:nvSpPr>
+        <p:spPr>
+          <a:xfrm>
+            <a:off x="5349240" y="1005840"/>
+            <a:ext cx="6522415" cy="731520"/>
+          </a:xfrm>
+          <a:prstGeom prst="rect">
+            <a:avLst/>
+          </a:prstGeom>
+          <a:noFill/>
+          <a:ln/>
+        </p:spPr>
+        <p:txBody>
+          <a:bodyPr wrap="square" lIns="0" tIns="0" rIns="0" bIns="0" rtlCol="0" anchor="ctr">
+            <a:normAutofit/>
+          </a:bodyPr>
+          <a:lstStyle/>
+          <a:p>
+            <a:pPr algn="ctr" indent="0" marL="0">
+              <a:buNone/>
+            </a:pPr>
+            <a:r>
+              <a:rPr lang="en-US" sz="3600" b="1" dirty="0">
+                <a:solidFill>
+                  <a:srgbClr val="990011"/>
+                </a:solidFill>
+                <a:latin typeface="Times New Roman" pitchFamily="34" charset="0"/>
+                <a:ea typeface="Times New Roman" pitchFamily="34" charset="-122"/>
+                <a:cs typeface="Times New Roman" pitchFamily="34" charset="-120"/>
+              </a:rPr>
+              <a:t>Evaluation 2</a:t>
+            </a:r>
+            <a:endParaRPr lang="en-US" sz="3600" dirty="0"/>
+          </a:p>
+        </p:txBody>
+      </p:sp>
+      <p:sp>
+        <p:nvSpPr>
+          <p:cNvPr id="5" name="Text 2"/>
+          <p:cNvSpPr/>
+          <p:nvPr/>
+        </p:nvSpPr>
+        <p:spPr>
+          <a:xfrm>
+            <a:off x="5349240" y="1783080"/>
+            <a:ext cx="6522415" cy="4663440"/>
+          </a:xfrm>
+          <a:prstGeom prst="rect">
+            <a:avLst/>
+          </a:prstGeom>
+          <a:noFill/>
+          <a:ln/>
+        </p:spPr>
+        <p:txBody>
+          <a:bodyPr wrap="square" lIns="0" tIns="0" rIns="0" bIns="0" rtlCol="0" anchor="t"/>
+          <a:lstStyle/>
+          <a:p>
+            <a:pPr algn="l" indent="0" marL="0">
+              <a:spcAft>
+                <a:spcPts val="800"/>
+              </a:spcAft>
+              <a:buNone/>
+            </a:pPr>
+            <a:r>
+              <a:rPr lang="en-US" sz="4000" dirty="0">
+                <a:solidFill>
+                  <a:srgbClr val="111111"/>
+                </a:solidFill>
+                <a:latin typeface="Times New Roman" pitchFamily="34" charset="0"/>
+                <a:ea typeface="Times New Roman" pitchFamily="34" charset="-122"/>
+                <a:cs typeface="Times New Roman" pitchFamily="34" charset="-120"/>
+              </a:rPr>
+              <a:t>Give two problems of industry in Cameroon.</a:t>
+            </a:r>
+            <a:endParaRPr lang="en-US" sz="4000" dirty="0"/>
+          </a:p>
+        </p:txBody>
+      </p:sp>
+      <p:sp>
+        <p:nvSpPr>
+          <p:cNvPr id="25" name="Slide Number Placeholder 0"/>
+          <p:cNvSpPr>
+            <a:spLocks noGrp="1"/>
+          </p:cNvSpPr>
+          <p:nvPr>
+            <p:ph type="sldNum" sz="quarter" idx="4294967295"/>
+          </p:nvPr>
+        </p:nvSpPr>
+        <p:spPr>
+          <a:xfrm>
+            <a:off x="27432" y="91440"/>
+            <a:ext cx="585216" cy="475488"/>
+          </a:xfrm>
+          <a:prstGeom prst="rect">
+            <a:avLst/>
+          </a:prstGeom>
+          <a:extLst>
+            <a:ext uri="{C572A759-6A51-4108-AA02-DFA0A04FC94B}">
+              <ma14:wrappingTextBoxFlag xmlns:ma14="http://schemas.microsoft.com/office/mac/drawingml/2011/main" val="0"/>
+            </a:ext>
+          </a:extLst>
+        </p:spPr>
+        <p:txBody>
+          <a:bodyPr/>
+          <a:lstStyle>
+            <a:lvl1pPr>
+              <a:defRPr sz="2000">
+                <a:solidFill>
+                  <a:srgbClr val="FFFFFF"/>
+                </a:solidFill>
+                <a:latin typeface="Calibri"/>
+                <a:ea typeface="Calibri"/>
+                <a:cs typeface="Calibri"/>
+              </a:defRPr>
+            </a:lvl1pPr>
+          </a:lstStyle>
+          <a:p>
+            <a:pPr algn="ctr"/>
+            <a:fld id="{F7021451-1387-4CA6-816F-3879F97B5CBC}" type="slidenum">
+              <a:rPr b="1" lang="en-US"/>
+              <a:t>48</a:t>
+            </a:fld>
+            <a:endParaRPr lang="en-US"/>
+          </a:p>
+        </p:txBody>
+      </p:sp>
+    </p:spTree>
+  </p:cSld>
+  <p:clrMapOvr>
+    <a:masterClrMapping/>
+  </p:clrMapOvr>
+</p:sld>
+</file>
+
+<file path=ppt/slides/slide49.xml><?xml version="1.0" encoding="utf-8"?>
+<p:sld xmlns:a="http://schemas.openxmlformats.org/drawingml/2006/main" xmlns:r="http://schemas.openxmlformats.org/officeDocument/2006/relationships" xmlns:p="http://schemas.openxmlformats.org/presentationml/2006/main">
+  <p:cSld name="Slide 49">
+    <p:spTree>
+      <p:nvGrpSpPr>
+        <p:cNvPr id="1" name=""/>
+        <p:cNvGrpSpPr/>
+        <p:nvPr/>
+      </p:nvGrpSpPr>
+      <p:grpSpPr>
+        <a:xfrm>
+          <a:off x="0" y="0"/>
+          <a:ext cx="0" cy="0"/>
+          <a:chOff x="0" y="0"/>
+          <a:chExt cx="0" cy="0"/>
+        </a:xfrm>
+      </p:grpSpPr>
+      <p:sp>
+        <p:nvSpPr>
+          <p:cNvPr id="2" name="Text 0"/>
+          <p:cNvSpPr/>
+          <p:nvPr/>
+        </p:nvSpPr>
+        <p:spPr>
+          <a:xfrm>
+            <a:off x="457200" y="713232"/>
+            <a:ext cx="11368735" cy="274320"/>
+          </a:xfrm>
+          <a:prstGeom prst="rect">
+            <a:avLst/>
+          </a:prstGeom>
+          <a:noFill/>
+          <a:ln/>
+        </p:spPr>
+        <p:txBody>
+          <a:bodyPr wrap="square" lIns="0" tIns="0" rIns="0" bIns="0" rtlCol="0" anchor="ctr"/>
+          <a:lstStyle/>
+          <a:p>
+            <a:pPr algn="r" indent="0" marL="0">
+              <a:buNone/>
+            </a:pPr>
+            <a:r>
+              <a:rPr lang="en-US" sz="1400" b="1" dirty="0">
+                <a:solidFill>
+                  <a:srgbClr val="1C3F6E"/>
+                </a:solidFill>
+                <a:latin typeface="Calibri" pitchFamily="34" charset="0"/>
+                <a:ea typeface="Calibri" pitchFamily="34" charset="-122"/>
+                <a:cs typeface="Calibri" pitchFamily="34" charset="-120"/>
+              </a:rPr>
+              <a:t>FORMATIVE EVALUATION</a:t>
+            </a:r>
+            <a:endParaRPr lang="en-US" sz="1400" dirty="0"/>
+          </a:p>
+        </p:txBody>
+      </p:sp>
+      <p:pic>
+        <p:nvPicPr>
+          <p:cNvPr id="3" name="Image 0" descr="/home/claude/f4/img/minesec_sheet.png">    </p:cNvPr>
+          <p:cNvPicPr>
+            <a:picLocks noChangeAspect="1"/>
+          </p:cNvPicPr>
+          <p:nvPr/>
+        </p:nvPicPr>
+        <p:blipFill>
+          <a:blip r:embed="rId1"/>
+          <a:stretch>
+            <a:fillRect/>
+          </a:stretch>
+        </p:blipFill>
+        <p:spPr>
+          <a:xfrm>
+            <a:off x="0" y="658368"/>
+            <a:ext cx="5120640" cy="5833872"/>
+          </a:xfrm>
+          <a:prstGeom prst="rect">
+            <a:avLst/>
+          </a:prstGeom>
+        </p:spPr>
+      </p:pic>
+      <p:sp>
+        <p:nvSpPr>
+          <p:cNvPr id="4" name="Text 1"/>
+          <p:cNvSpPr/>
+          <p:nvPr/>
+        </p:nvSpPr>
+        <p:spPr>
+          <a:xfrm>
+            <a:off x="5349240" y="1005840"/>
+            <a:ext cx="6522415" cy="731520"/>
+          </a:xfrm>
+          <a:prstGeom prst="rect">
+            <a:avLst/>
+          </a:prstGeom>
+          <a:noFill/>
+          <a:ln/>
+        </p:spPr>
+        <p:txBody>
+          <a:bodyPr wrap="square" lIns="0" tIns="0" rIns="0" bIns="0" rtlCol="0" anchor="ctr">
+            <a:normAutofit/>
+          </a:bodyPr>
+          <a:lstStyle/>
+          <a:p>
+            <a:pPr algn="ctr" indent="0" marL="0">
+              <a:buNone/>
+            </a:pPr>
+            <a:r>
+              <a:rPr lang="en-US" sz="3600" b="1" dirty="0">
+                <a:solidFill>
+                  <a:srgbClr val="990011"/>
+                </a:solidFill>
+                <a:latin typeface="Times New Roman" pitchFamily="34" charset="0"/>
+                <a:ea typeface="Times New Roman" pitchFamily="34" charset="-122"/>
+                <a:cs typeface="Times New Roman" pitchFamily="34" charset="-120"/>
+              </a:rPr>
+              <a:t>Expected Answer</a:t>
+            </a:r>
+            <a:endParaRPr lang="en-US" sz="3600" dirty="0"/>
+          </a:p>
+        </p:txBody>
+      </p:sp>
+      <p:sp>
+        <p:nvSpPr>
+          <p:cNvPr id="5" name="Text 2"/>
+          <p:cNvSpPr/>
+          <p:nvPr/>
+        </p:nvSpPr>
+        <p:spPr>
+          <a:xfrm>
+            <a:off x="5349240" y="1783080"/>
+            <a:ext cx="6522415" cy="4663440"/>
+          </a:xfrm>
+          <a:prstGeom prst="rect">
+            <a:avLst/>
+          </a:prstGeom>
+          <a:noFill/>
+          <a:ln/>
+        </p:spPr>
+        <p:txBody>
+          <a:bodyPr wrap="square" lIns="0" tIns="0" rIns="0" bIns="0" rtlCol="0" anchor="t"/>
+          <a:lstStyle/>
+          <a:p>
+            <a:pPr algn="l" indent="0" marL="0">
+              <a:spcAft>
+                <a:spcPts val="800"/>
+              </a:spcAft>
+              <a:buNone/>
+            </a:pPr>
+            <a:r>
+              <a:rPr lang="en-US" sz="4000" dirty="0">
+                <a:solidFill>
+                  <a:srgbClr val="111111"/>
+                </a:solidFill>
+                <a:latin typeface="Times New Roman" pitchFamily="34" charset="0"/>
+                <a:ea typeface="Times New Roman" pitchFamily="34" charset="-122"/>
+                <a:cs typeface="Times New Roman" pitchFamily="34" charset="-120"/>
+              </a:rPr>
+              <a:t>Power cuts and competition from imports.</a:t>
+            </a:r>
+            <a:endParaRPr lang="en-US" sz="4000" dirty="0"/>
+          </a:p>
+        </p:txBody>
+      </p:sp>
+      <p:sp>
+        <p:nvSpPr>
+          <p:cNvPr id="25" name="Slide Number Placeholder 0"/>
+          <p:cNvSpPr>
+            <a:spLocks noGrp="1"/>
+          </p:cNvSpPr>
+          <p:nvPr>
+            <p:ph type="sldNum" sz="quarter" idx="4294967295"/>
+          </p:nvPr>
+        </p:nvSpPr>
+        <p:spPr>
+          <a:xfrm>
+            <a:off x="27432" y="91440"/>
+            <a:ext cx="585216" cy="475488"/>
+          </a:xfrm>
+          <a:prstGeom prst="rect">
+            <a:avLst/>
+          </a:prstGeom>
+          <a:extLst>
+            <a:ext uri="{C572A759-6A51-4108-AA02-DFA0A04FC94B}">
+              <ma14:wrappingTextBoxFlag xmlns:ma14="http://schemas.microsoft.com/office/mac/drawingml/2011/main" val="0"/>
+            </a:ext>
+          </a:extLst>
+        </p:spPr>
+        <p:txBody>
+          <a:bodyPr/>
+          <a:lstStyle>
+            <a:lvl1pPr>
+              <a:defRPr sz="2000">
+                <a:solidFill>
+                  <a:srgbClr val="FFFFFF"/>
+                </a:solidFill>
+                <a:latin typeface="Calibri"/>
+                <a:ea typeface="Calibri"/>
+                <a:cs typeface="Calibri"/>
+              </a:defRPr>
+            </a:lvl1pPr>
+          </a:lstStyle>
+          <a:p>
+            <a:pPr algn="ctr"/>
+            <a:fld id="{F7021451-1387-4CA6-816F-3879F97B5CBC}" type="slidenum">
+              <a:rPr b="1" lang="en-US"/>
+              <a:t>49</a:t>
+            </a:fld>
+            <a:endParaRPr lang="en-US"/>
+          </a:p>
+        </p:txBody>
+      </p:sp>
+    </p:spTree>
+  </p:cSld>
+  <p:clrMapOvr>
+    <a:masterClrMapping/>
+  </p:clrMapOvr>
+</p:sld>
+</file>
+
+<file path=ppt/slides/slide5.xml><?xml version="1.0" encoding="utf-8"?>
+<p:sld xmlns:a="http://schemas.openxmlformats.org/drawingml/2006/main" xmlns:r="http://schemas.openxmlformats.org/officeDocument/2006/relationships" xmlns:p="http://schemas.openxmlformats.org/presentationml/2006/main">
+  <p:cSld name="Slide 5">
+    <p:spTree>
+      <p:nvGrpSpPr>
+        <p:cNvPr id="1" name=""/>
+        <p:cNvGrpSpPr/>
+        <p:nvPr/>
+      </p:nvGrpSpPr>
+      <p:grpSpPr>
+        <a:xfrm>
+          <a:off x="0" y="0"/>
+          <a:ext cx="0" cy="0"/>
+          <a:chOff x="0" y="0"/>
+          <a:chExt cx="0" cy="0"/>
+        </a:xfrm>
+      </p:grpSpPr>
+      <p:sp>
+        <p:nvSpPr>
+          <p:cNvPr id="2" name="Text 0"/>
+          <p:cNvSpPr/>
+          <p:nvPr/>
+        </p:nvSpPr>
+        <p:spPr>
+          <a:xfrm>
+            <a:off x="457200" y="713232"/>
+            <a:ext cx="11368735" cy="274320"/>
+          </a:xfrm>
+          <a:prstGeom prst="rect">
+            <a:avLst/>
+          </a:prstGeom>
+          <a:noFill/>
+          <a:ln/>
+        </p:spPr>
+        <p:txBody>
+          <a:bodyPr wrap="square" lIns="0" tIns="0" rIns="0" bIns="0" rtlCol="0" anchor="ctr"/>
+          <a:lstStyle/>
+          <a:p>
+            <a:pPr algn="r" indent="0" marL="0">
+              <a:buNone/>
+            </a:pPr>
+            <a:r>
+              <a:rPr lang="en-US" sz="1400" b="1" dirty="0">
+                <a:solidFill>
+                  <a:srgbClr val="1C3F6E"/>
+                </a:solidFill>
+                <a:latin typeface="Calibri" pitchFamily="34" charset="0"/>
+                <a:ea typeface="Calibri" pitchFamily="34" charset="-122"/>
+                <a:cs typeface="Calibri" pitchFamily="34" charset="-120"/>
+              </a:rPr>
+              <a:t>HOMEWORK CORRECTION</a:t>
+            </a:r>
+            <a:endParaRPr lang="en-US" sz="1400" dirty="0"/>
+          </a:p>
+        </p:txBody>
+      </p:sp>
+      <p:pic>
+        <p:nvPicPr>
+          <p:cNvPr id="3" name="Image 0" descr="/home/claude/f4/img/minesec_sheet.png">    </p:cNvPr>
+          <p:cNvPicPr>
+            <a:picLocks noChangeAspect="1"/>
+          </p:cNvPicPr>
+          <p:nvPr/>
+        </p:nvPicPr>
+        <p:blipFill>
+          <a:blip r:embed="rId1"/>
+          <a:stretch>
+            <a:fillRect/>
+          </a:stretch>
+        </p:blipFill>
+        <p:spPr>
+          <a:xfrm>
+            <a:off x="0" y="658368"/>
+            <a:ext cx="5120640" cy="5833872"/>
+          </a:xfrm>
+          <a:prstGeom prst="rect">
+            <a:avLst/>
+          </a:prstGeom>
+        </p:spPr>
+      </p:pic>
+      <p:sp>
+        <p:nvSpPr>
+          <p:cNvPr id="4" name="Text 1"/>
+          <p:cNvSpPr/>
+          <p:nvPr/>
+        </p:nvSpPr>
+        <p:spPr>
+          <a:xfrm>
+            <a:off x="5349240" y="1005840"/>
+            <a:ext cx="6522415" cy="731520"/>
+          </a:xfrm>
+          <a:prstGeom prst="rect">
+            <a:avLst/>
+          </a:prstGeom>
+          <a:noFill/>
+          <a:ln/>
+        </p:spPr>
+        <p:txBody>
+          <a:bodyPr wrap="square" lIns="0" tIns="0" rIns="0" bIns="0" rtlCol="0" anchor="ctr">
+            <a:normAutofit/>
+          </a:bodyPr>
+          <a:lstStyle/>
+          <a:p>
+            <a:pPr algn="ctr" indent="0" marL="0">
+              <a:buNone/>
+            </a:pPr>
+            <a:r>
+              <a:rPr lang="en-US" sz="3600" b="1" dirty="0">
+                <a:solidFill>
+                  <a:srgbClr val="990011"/>
+                </a:solidFill>
+                <a:latin typeface="Times New Roman" pitchFamily="34" charset="0"/>
+                <a:ea typeface="Times New Roman" pitchFamily="34" charset="-122"/>
+                <a:cs typeface="Times New Roman" pitchFamily="34" charset="-120"/>
+              </a:rPr>
+              <a:t>Correction: Possible Answer</a:t>
+            </a:r>
+            <a:endParaRPr lang="en-US" sz="3600" dirty="0"/>
+          </a:p>
+        </p:txBody>
+      </p:sp>
+      <p:sp>
+        <p:nvSpPr>
+          <p:cNvPr id="5" name="Text 2"/>
+          <p:cNvSpPr/>
+          <p:nvPr/>
+        </p:nvSpPr>
+        <p:spPr>
+          <a:xfrm>
+            <a:off x="5349240" y="1783080"/>
+            <a:ext cx="6522415" cy="4663440"/>
+          </a:xfrm>
+          <a:prstGeom prst="rect">
+            <a:avLst/>
+          </a:prstGeom>
+          <a:noFill/>
+          <a:ln/>
+        </p:spPr>
+        <p:txBody>
+          <a:bodyPr wrap="square" lIns="0" tIns="0" rIns="0" bIns="0" rtlCol="0" anchor="t"/>
+          <a:lstStyle/>
+          <a:p>
+            <a:pPr algn="l" indent="0" marL="0">
+              <a:spcAft>
+                <a:spcPts val="800"/>
+              </a:spcAft>
+              <a:buNone/>
+            </a:pPr>
+            <a:r>
+              <a:rPr lang="en-US" sz="4000" dirty="0">
+                <a:solidFill>
+                  <a:srgbClr val="111111"/>
+                </a:solidFill>
+                <a:latin typeface="Times New Roman" pitchFamily="34" charset="0"/>
+                <a:ea typeface="Times New Roman" pitchFamily="34" charset="-122"/>
+                <a:cs typeface="Times New Roman" pitchFamily="34" charset="-120"/>
+              </a:rPr>
+              <a:t>Example: the Mbandjock sugar factory is near the cane fields because cane loses much weight when processed (weight-losing industry), so it is cheaper to carry sugar than cane.</a:t>
+            </a:r>
+            <a:endParaRPr lang="en-US" sz="4000" dirty="0"/>
+          </a:p>
+        </p:txBody>
+      </p:sp>
+      <p:sp>
+        <p:nvSpPr>
+          <p:cNvPr id="25" name="Slide Number Placeholder 0"/>
+          <p:cNvSpPr>
+            <a:spLocks noGrp="1"/>
+          </p:cNvSpPr>
+          <p:nvPr>
+            <p:ph type="sldNum" sz="quarter" idx="4294967295"/>
+          </p:nvPr>
+        </p:nvSpPr>
+        <p:spPr>
+          <a:xfrm>
+            <a:off x="27432" y="91440"/>
+            <a:ext cx="585216" cy="475488"/>
+          </a:xfrm>
+          <a:prstGeom prst="rect">
+            <a:avLst/>
+          </a:prstGeom>
+          <a:extLst>
+            <a:ext uri="{C572A759-6A51-4108-AA02-DFA0A04FC94B}">
+              <ma14:wrappingTextBoxFlag xmlns:ma14="http://schemas.microsoft.com/office/mac/drawingml/2011/main" val="0"/>
+            </a:ext>
+          </a:extLst>
+        </p:spPr>
+        <p:txBody>
+          <a:bodyPr/>
+          <a:lstStyle>
+            <a:lvl1pPr>
+              <a:defRPr sz="2000">
+                <a:solidFill>
+                  <a:srgbClr val="FFFFFF"/>
+                </a:solidFill>
+                <a:latin typeface="Calibri"/>
+                <a:ea typeface="Calibri"/>
+                <a:cs typeface="Calibri"/>
+              </a:defRPr>
+            </a:lvl1pPr>
+          </a:lstStyle>
+          <a:p>
+            <a:pPr algn="ctr"/>
+            <a:fld id="{F7021451-1387-4CA6-816F-3879F97B5CBC}" type="slidenum">
+              <a:rPr b="1" lang="en-US"/>
+              <a:t>5</a:t>
+            </a:fld>
+            <a:endParaRPr lang="en-US"/>
+          </a:p>
+        </p:txBody>
+      </p:sp>
+    </p:spTree>
+  </p:cSld>
+  <p:clrMapOvr>
+    <a:masterClrMapping/>
+  </p:clrMapOvr>
+</p:sld>
+</file>
+
+<file path=ppt/slides/slide50.xml><?xml version="1.0" encoding="utf-8"?>
+<p:sld xmlns:a="http://schemas.openxmlformats.org/drawingml/2006/main" xmlns:r="http://schemas.openxmlformats.org/officeDocument/2006/relationships" xmlns:p="http://schemas.openxmlformats.org/presentationml/2006/main">
+  <p:cSld name="Slide 50">
+    <p:spTree>
+      <p:nvGrpSpPr>
+        <p:cNvPr id="1" name=""/>
+        <p:cNvGrpSpPr/>
+        <p:nvPr/>
+      </p:nvGrpSpPr>
+      <p:grpSpPr>
+        <a:xfrm>
+          <a:off x="0" y="0"/>
+          <a:ext cx="0" cy="0"/>
+          <a:chOff x="0" y="0"/>
+          <a:chExt cx="0" cy="0"/>
+        </a:xfrm>
+      </p:grpSpPr>
+      <p:sp>
+        <p:nvSpPr>
+          <p:cNvPr id="2" name="Text 0"/>
+          <p:cNvSpPr/>
+          <p:nvPr/>
+        </p:nvSpPr>
+        <p:spPr>
+          <a:xfrm>
+            <a:off x="457200" y="713232"/>
+            <a:ext cx="11368735" cy="274320"/>
+          </a:xfrm>
+          <a:prstGeom prst="rect">
+            <a:avLst/>
+          </a:prstGeom>
+          <a:noFill/>
+          <a:ln/>
+        </p:spPr>
+        <p:txBody>
+          <a:bodyPr wrap="square" lIns="0" tIns="0" rIns="0" bIns="0" rtlCol="0" anchor="ctr"/>
+          <a:lstStyle/>
+          <a:p>
+            <a:pPr algn="r" indent="0" marL="0">
+              <a:buNone/>
+            </a:pPr>
+            <a:r>
+              <a:rPr lang="en-US" sz="1400" b="1" dirty="0">
+                <a:solidFill>
+                  <a:srgbClr val="1C3F6E"/>
+                </a:solidFill>
+                <a:latin typeface="Calibri" pitchFamily="34" charset="0"/>
+                <a:ea typeface="Calibri" pitchFamily="34" charset="-122"/>
+                <a:cs typeface="Calibri" pitchFamily="34" charset="-120"/>
+              </a:rPr>
+              <a:t>REMEDIATION</a:t>
+            </a:r>
+            <a:endParaRPr lang="en-US" sz="1400" dirty="0"/>
+          </a:p>
+        </p:txBody>
+      </p:sp>
+      <p:pic>
+        <p:nvPicPr>
+          <p:cNvPr id="3" name="Image 0" descr="/home/claude/f4/img/minesec_sheet.png">    </p:cNvPr>
+          <p:cNvPicPr>
+            <a:picLocks noChangeAspect="1"/>
+          </p:cNvPicPr>
+          <p:nvPr/>
+        </p:nvPicPr>
+        <p:blipFill>
+          <a:blip r:embed="rId1"/>
+          <a:stretch>
+            <a:fillRect/>
+          </a:stretch>
+        </p:blipFill>
+        <p:spPr>
+          <a:xfrm>
+            <a:off x="0" y="658368"/>
+            <a:ext cx="3840480" cy="5833872"/>
+          </a:xfrm>
+          <a:prstGeom prst="rect">
+            <a:avLst/>
+          </a:prstGeom>
+        </p:spPr>
+      </p:pic>
+      <p:sp>
+        <p:nvSpPr>
+          <p:cNvPr id="4" name="Text 1"/>
+          <p:cNvSpPr/>
+          <p:nvPr/>
+        </p:nvSpPr>
+        <p:spPr>
+          <a:xfrm>
+            <a:off x="4069080" y="1005840"/>
+            <a:ext cx="7802575" cy="731520"/>
+          </a:xfrm>
+          <a:prstGeom prst="rect">
+            <a:avLst/>
+          </a:prstGeom>
+          <a:noFill/>
+          <a:ln/>
+        </p:spPr>
+        <p:txBody>
+          <a:bodyPr wrap="square" lIns="0" tIns="0" rIns="0" bIns="0" rtlCol="0" anchor="ctr">
+            <a:normAutofit/>
+          </a:bodyPr>
+          <a:lstStyle/>
+          <a:p>
+            <a:pPr algn="ctr" indent="0" marL="0">
+              <a:buNone/>
+            </a:pPr>
+            <a:r>
+              <a:rPr lang="en-US" sz="3600" b="1" dirty="0">
+                <a:solidFill>
+                  <a:srgbClr val="990011"/>
+                </a:solidFill>
+                <a:latin typeface="Times New Roman" pitchFamily="34" charset="0"/>
+                <a:ea typeface="Times New Roman" pitchFamily="34" charset="-122"/>
+                <a:cs typeface="Times New Roman" pitchFamily="34" charset="-120"/>
+              </a:rPr>
+              <a:t>Remediation</a:t>
+            </a:r>
+            <a:endParaRPr lang="en-US" sz="3600" dirty="0"/>
+          </a:p>
+        </p:txBody>
+      </p:sp>
+      <p:sp>
+        <p:nvSpPr>
+          <p:cNvPr id="5" name="Text 2"/>
+          <p:cNvSpPr/>
+          <p:nvPr/>
+        </p:nvSpPr>
+        <p:spPr>
+          <a:xfrm>
+            <a:off x="4069080" y="1783080"/>
+            <a:ext cx="7802575" cy="4663440"/>
+          </a:xfrm>
+          <a:prstGeom prst="rect">
+            <a:avLst/>
+          </a:prstGeom>
+          <a:noFill/>
+          <a:ln/>
+        </p:spPr>
+        <p:txBody>
+          <a:bodyPr wrap="square" lIns="0" tIns="0" rIns="0" bIns="0" rtlCol="0" anchor="t"/>
+          <a:lstStyle/>
+          <a:p>
+            <a:pPr algn="l" indent="0" marL="0">
+              <a:spcAft>
+                <a:spcPts val="800"/>
+              </a:spcAft>
+              <a:buNone/>
+            </a:pPr>
+            <a:r>
+              <a:rPr lang="en-US" sz="4000" b="1" dirty="0">
+                <a:solidFill>
+                  <a:srgbClr val="111111"/>
+                </a:solidFill>
+                <a:latin typeface="Times New Roman" pitchFamily="34" charset="0"/>
+                <a:ea typeface="Times New Roman" pitchFamily="34" charset="-122"/>
+                <a:cs typeface="Times New Roman" pitchFamily="34" charset="-120"/>
+              </a:rPr>
+              <a:t>Fill in the blanks:</a:t>
+            </a:r>
+            <a:endParaRPr lang="en-US" sz="4000" dirty="0"/>
+          </a:p>
+          <a:p>
+            <a:pPr algn="l" marL="342900" indent="-342900">
+              <a:spcAft>
+                <a:spcPts val="800"/>
+              </a:spcAft>
+              <a:buSzPct val="100000"/>
+              <a:buFont typeface="+mj-lt"/>
+              <a:buAutoNum type="arabicPeriod" startAt="1"/>
+            </a:pPr>
+            <a:r>
+              <a:rPr lang="en-US" sz="4000" dirty="0">
+                <a:solidFill>
+                  <a:srgbClr val="111111"/>
+                </a:solidFill>
+                <a:latin typeface="Times New Roman" pitchFamily="34" charset="0"/>
+                <a:ea typeface="Times New Roman" pitchFamily="34" charset="-122"/>
+                <a:cs typeface="Times New Roman" pitchFamily="34" charset="-120"/>
+              </a:rPr>
+              <a:t>Aluminium is made at ______.</a:t>
+            </a:r>
+            <a:endParaRPr lang="en-US" sz="4000" dirty="0"/>
+          </a:p>
+          <a:p>
+            <a:pPr algn="l" marL="342900" indent="-342900">
+              <a:spcAft>
+                <a:spcPts val="800"/>
+              </a:spcAft>
+              <a:buSzPct val="100000"/>
+              <a:buFont typeface="+mj-lt"/>
+              <a:buAutoNum type="arabicPeriod" startAt="1"/>
+            </a:pPr>
+            <a:r>
+              <a:rPr lang="en-US" sz="4000" dirty="0">
+                <a:solidFill>
+                  <a:srgbClr val="111111"/>
+                </a:solidFill>
+                <a:latin typeface="Times New Roman" pitchFamily="34" charset="0"/>
+                <a:ea typeface="Times New Roman" pitchFamily="34" charset="-122"/>
+                <a:cs typeface="Times New Roman" pitchFamily="34" charset="-120"/>
+              </a:rPr>
+              <a:t>The oil refinery is at ______.</a:t>
+            </a:r>
+            <a:endParaRPr lang="en-US" sz="4000" dirty="0"/>
+          </a:p>
+          <a:p>
+            <a:pPr algn="l" marL="342900" indent="-342900">
+              <a:spcAft>
+                <a:spcPts val="800"/>
+              </a:spcAft>
+              <a:buSzPct val="100000"/>
+              <a:buFont typeface="+mj-lt"/>
+              <a:buAutoNum type="arabicPeriod" startAt="1"/>
+            </a:pPr>
+            <a:r>
+              <a:rPr lang="en-US" sz="4000" dirty="0">
+                <a:solidFill>
+                  <a:srgbClr val="111111"/>
+                </a:solidFill>
+                <a:latin typeface="Times New Roman" pitchFamily="34" charset="0"/>
+                <a:ea typeface="Times New Roman" pitchFamily="34" charset="-122"/>
+                <a:cs typeface="Times New Roman" pitchFamily="34" charset="-120"/>
+              </a:rPr>
+              <a:t>Cement is made from limestone at ______.</a:t>
+            </a:r>
+            <a:endParaRPr lang="en-US" sz="4000" dirty="0"/>
+          </a:p>
+        </p:txBody>
+      </p:sp>
+      <p:sp>
+        <p:nvSpPr>
+          <p:cNvPr id="25" name="Slide Number Placeholder 0"/>
+          <p:cNvSpPr>
+            <a:spLocks noGrp="1"/>
+          </p:cNvSpPr>
+          <p:nvPr>
+            <p:ph type="sldNum" sz="quarter" idx="4294967295"/>
+          </p:nvPr>
+        </p:nvSpPr>
+        <p:spPr>
+          <a:xfrm>
+            <a:off x="27432" y="91440"/>
+            <a:ext cx="585216" cy="475488"/>
+          </a:xfrm>
+          <a:prstGeom prst="rect">
+            <a:avLst/>
+          </a:prstGeom>
+          <a:extLst>
+            <a:ext uri="{C572A759-6A51-4108-AA02-DFA0A04FC94B}">
+              <ma14:wrappingTextBoxFlag xmlns:ma14="http://schemas.microsoft.com/office/mac/drawingml/2011/main" val="0"/>
+            </a:ext>
+          </a:extLst>
+        </p:spPr>
+        <p:txBody>
+          <a:bodyPr/>
+          <a:lstStyle>
+            <a:lvl1pPr>
+              <a:defRPr sz="2000">
+                <a:solidFill>
+                  <a:srgbClr val="FFFFFF"/>
+                </a:solidFill>
+                <a:latin typeface="Calibri"/>
+                <a:ea typeface="Calibri"/>
+                <a:cs typeface="Calibri"/>
+              </a:defRPr>
+            </a:lvl1pPr>
+          </a:lstStyle>
+          <a:p>
+            <a:pPr algn="ctr"/>
+            <a:fld id="{F7021451-1387-4CA6-816F-3879F97B5CBC}" type="slidenum">
+              <a:rPr b="1" lang="en-US"/>
+              <a:t>50</a:t>
+            </a:fld>
+            <a:endParaRPr lang="en-US"/>
+          </a:p>
+        </p:txBody>
+      </p:sp>
+    </p:spTree>
+  </p:cSld>
+  <p:clrMapOvr>
+    <a:masterClrMapping/>
+  </p:clrMapOvr>
+</p:sld>
+</file>
+
+<file path=ppt/slides/slide51.xml><?xml version="1.0" encoding="utf-8"?>
+<p:sld xmlns:a="http://schemas.openxmlformats.org/drawingml/2006/main" xmlns:r="http://schemas.openxmlformats.org/officeDocument/2006/relationships" xmlns:p="http://schemas.openxmlformats.org/presentationml/2006/main">
+  <p:cSld name="Slide 51">
+    <p:spTree>
+      <p:nvGrpSpPr>
+        <p:cNvPr id="1" name=""/>
+        <p:cNvGrpSpPr/>
+        <p:nvPr/>
+      </p:nvGrpSpPr>
+      <p:grpSpPr>
+        <a:xfrm>
+          <a:off x="0" y="0"/>
+          <a:ext cx="0" cy="0"/>
+          <a:chOff x="0" y="0"/>
+          <a:chExt cx="0" cy="0"/>
+        </a:xfrm>
+      </p:grpSpPr>
+      <p:sp>
+        <p:nvSpPr>
+          <p:cNvPr id="2" name="Text 0"/>
+          <p:cNvSpPr/>
+          <p:nvPr/>
+        </p:nvSpPr>
+        <p:spPr>
+          <a:xfrm>
+            <a:off x="457200" y="713232"/>
+            <a:ext cx="11368735" cy="274320"/>
+          </a:xfrm>
+          <a:prstGeom prst="rect">
+            <a:avLst/>
+          </a:prstGeom>
+          <a:noFill/>
+          <a:ln/>
+        </p:spPr>
+        <p:txBody>
+          <a:bodyPr wrap="square" lIns="0" tIns="0" rIns="0" bIns="0" rtlCol="0" anchor="ctr"/>
+          <a:lstStyle/>
+          <a:p>
+            <a:pPr algn="r" indent="0" marL="0">
+              <a:buNone/>
+            </a:pPr>
+            <a:r>
+              <a:rPr lang="en-US" sz="1400" b="1" dirty="0">
+                <a:solidFill>
+                  <a:srgbClr val="1C3F6E"/>
+                </a:solidFill>
+                <a:latin typeface="Calibri" pitchFamily="34" charset="0"/>
+                <a:ea typeface="Calibri" pitchFamily="34" charset="-122"/>
+                <a:cs typeface="Calibri" pitchFamily="34" charset="-120"/>
+              </a:rPr>
+              <a:t>HOMEWORK</a:t>
+            </a:r>
+            <a:endParaRPr lang="en-US" sz="1400" dirty="0"/>
+          </a:p>
+        </p:txBody>
+      </p:sp>
+      <p:pic>
+        <p:nvPicPr>
+          <p:cNvPr id="3" name="Image 0" descr="/home/claude/f4/img/minesec_sheet.png">    </p:cNvPr>
+          <p:cNvPicPr>
+            <a:picLocks noChangeAspect="1"/>
+          </p:cNvPicPr>
+          <p:nvPr/>
+        </p:nvPicPr>
+        <p:blipFill>
+          <a:blip r:embed="rId1"/>
+          <a:stretch>
+            <a:fillRect/>
+          </a:stretch>
+        </p:blipFill>
+        <p:spPr>
+          <a:xfrm>
+            <a:off x="0" y="658368"/>
+            <a:ext cx="5120640" cy="5833872"/>
+          </a:xfrm>
+          <a:prstGeom prst="rect">
+            <a:avLst/>
+          </a:prstGeom>
+        </p:spPr>
+      </p:pic>
+      <p:sp>
+        <p:nvSpPr>
+          <p:cNvPr id="4" name="Text 1"/>
+          <p:cNvSpPr/>
+          <p:nvPr/>
+        </p:nvSpPr>
+        <p:spPr>
+          <a:xfrm>
+            <a:off x="5349240" y="1005840"/>
+            <a:ext cx="6522415" cy="731520"/>
+          </a:xfrm>
+          <a:prstGeom prst="rect">
+            <a:avLst/>
+          </a:prstGeom>
+          <a:noFill/>
+          <a:ln/>
+        </p:spPr>
+        <p:txBody>
+          <a:bodyPr wrap="square" lIns="0" tIns="0" rIns="0" bIns="0" rtlCol="0" anchor="ctr">
+            <a:normAutofit/>
+          </a:bodyPr>
+          <a:lstStyle/>
+          <a:p>
+            <a:pPr algn="ctr" indent="0" marL="0">
+              <a:buNone/>
+            </a:pPr>
+            <a:r>
+              <a:rPr lang="en-US" sz="3600" b="1" dirty="0">
+                <a:solidFill>
+                  <a:srgbClr val="990011"/>
+                </a:solidFill>
+                <a:latin typeface="Times New Roman" pitchFamily="34" charset="0"/>
+                <a:ea typeface="Times New Roman" pitchFamily="34" charset="-122"/>
+                <a:cs typeface="Times New Roman" pitchFamily="34" charset="-120"/>
+              </a:rPr>
+              <a:t>Homework</a:t>
+            </a:r>
+            <a:endParaRPr lang="en-US" sz="3600" dirty="0"/>
+          </a:p>
+        </p:txBody>
+      </p:sp>
+      <p:sp>
+        <p:nvSpPr>
+          <p:cNvPr id="5" name="Text 2"/>
+          <p:cNvSpPr/>
+          <p:nvPr/>
+        </p:nvSpPr>
+        <p:spPr>
+          <a:xfrm>
+            <a:off x="5349240" y="1783080"/>
+            <a:ext cx="6522415" cy="4663440"/>
+          </a:xfrm>
+          <a:prstGeom prst="rect">
+            <a:avLst/>
+          </a:prstGeom>
+          <a:noFill/>
+          <a:ln/>
+        </p:spPr>
+        <p:txBody>
+          <a:bodyPr wrap="square" lIns="0" tIns="0" rIns="0" bIns="0" rtlCol="0" anchor="t"/>
+          <a:lstStyle/>
+          <a:p>
+            <a:pPr algn="l" indent="0" marL="0">
+              <a:spcAft>
+                <a:spcPts val="800"/>
+              </a:spcAft>
+              <a:buNone/>
+            </a:pPr>
+            <a:r>
+              <a:rPr lang="en-US" sz="4000" dirty="0">
+                <a:solidFill>
+                  <a:srgbClr val="111111"/>
+                </a:solidFill>
+                <a:latin typeface="Times New Roman" pitchFamily="34" charset="0"/>
+                <a:ea typeface="Times New Roman" pitchFamily="34" charset="-122"/>
+                <a:cs typeface="Times New Roman" pitchFamily="34" charset="-120"/>
+              </a:rPr>
+              <a:t>Draw a sketch map of the industrial regions of Cameroon and name two industries in each.</a:t>
+            </a:r>
+            <a:endParaRPr lang="en-US" sz="4000" dirty="0"/>
+          </a:p>
+        </p:txBody>
+      </p:sp>
+      <p:sp>
+        <p:nvSpPr>
+          <p:cNvPr id="25" name="Slide Number Placeholder 0"/>
+          <p:cNvSpPr>
+            <a:spLocks noGrp="1"/>
+          </p:cNvSpPr>
+          <p:nvPr>
+            <p:ph type="sldNum" sz="quarter" idx="4294967295"/>
+          </p:nvPr>
+        </p:nvSpPr>
+        <p:spPr>
+          <a:xfrm>
+            <a:off x="27432" y="91440"/>
+            <a:ext cx="585216" cy="475488"/>
+          </a:xfrm>
+          <a:prstGeom prst="rect">
+            <a:avLst/>
+          </a:prstGeom>
+          <a:extLst>
+            <a:ext uri="{C572A759-6A51-4108-AA02-DFA0A04FC94B}">
+              <ma14:wrappingTextBoxFlag xmlns:ma14="http://schemas.microsoft.com/office/mac/drawingml/2011/main" val="0"/>
+            </a:ext>
+          </a:extLst>
+        </p:spPr>
+        <p:txBody>
+          <a:bodyPr/>
+          <a:lstStyle>
+            <a:lvl1pPr>
+              <a:defRPr sz="2000">
+                <a:solidFill>
+                  <a:srgbClr val="FFFFFF"/>
+                </a:solidFill>
+                <a:latin typeface="Calibri"/>
+                <a:ea typeface="Calibri"/>
+                <a:cs typeface="Calibri"/>
+              </a:defRPr>
+            </a:lvl1pPr>
+          </a:lstStyle>
+          <a:p>
+            <a:pPr algn="ctr"/>
+            <a:fld id="{F7021451-1387-4CA6-816F-3879F97B5CBC}" type="slidenum">
+              <a:rPr b="1" lang="en-US"/>
+              <a:t>51</a:t>
+            </a:fld>
+            <a:endParaRPr lang="en-US"/>
+          </a:p>
+        </p:txBody>
+      </p:sp>
+    </p:spTree>
+  </p:cSld>
+  <p:clrMapOvr>
+    <a:masterClrMapping/>
+  </p:clrMapOvr>
+</p:sld>
+</file>
+
+<file path=ppt/slides/slide52.xml><?xml version="1.0" encoding="utf-8"?>
+<p:sld xmlns:a="http://schemas.openxmlformats.org/drawingml/2006/main" xmlns:r="http://schemas.openxmlformats.org/officeDocument/2006/relationships" xmlns:p="http://schemas.openxmlformats.org/presentationml/2006/main">
+  <p:cSld name="Slide 52">
+    <p:spTree>
+      <p:nvGrpSpPr>
+        <p:cNvPr id="1" name=""/>
+        <p:cNvGrpSpPr/>
+        <p:nvPr/>
+      </p:nvGrpSpPr>
+      <p:grpSpPr>
+        <a:xfrm>
+          <a:off x="0" y="0"/>
+          <a:ext cx="0" cy="0"/>
+          <a:chOff x="0" y="0"/>
+          <a:chExt cx="0" cy="0"/>
+        </a:xfrm>
+      </p:grpSpPr>
+      <p:sp>
+        <p:nvSpPr>
+          <p:cNvPr id="2" name="Text 0"/>
+          <p:cNvSpPr/>
+          <p:nvPr/>
+        </p:nvSpPr>
+        <p:spPr>
+          <a:xfrm>
+            <a:off x="457200" y="713232"/>
+            <a:ext cx="11368735" cy="274320"/>
+          </a:xfrm>
+          <a:prstGeom prst="rect">
+            <a:avLst/>
+          </a:prstGeom>
+          <a:noFill/>
+          <a:ln/>
+        </p:spPr>
+        <p:txBody>
+          <a:bodyPr wrap="square" lIns="0" tIns="0" rIns="0" bIns="0" rtlCol="0" anchor="ctr"/>
+          <a:lstStyle/>
+          <a:p>
+            <a:pPr algn="r" indent="0" marL="0">
+              <a:buNone/>
+            </a:pPr>
+            <a:r>
+              <a:rPr lang="en-US" sz="1400" b="1" dirty="0">
+                <a:solidFill>
+                  <a:srgbClr val="1C3F6E"/>
+                </a:solidFill>
+                <a:latin typeface="Calibri" pitchFamily="34" charset="0"/>
+                <a:ea typeface="Calibri" pitchFamily="34" charset="-122"/>
+                <a:cs typeface="Calibri" pitchFamily="34" charset="-120"/>
+              </a:rPr>
+              <a:t>NEXT LESSON</a:t>
+            </a:r>
+            <a:endParaRPr lang="en-US" sz="1400" dirty="0"/>
+          </a:p>
+        </p:txBody>
+      </p:sp>
+      <p:pic>
+        <p:nvPicPr>
+          <p:cNvPr id="3" name="Image 0" descr="/home/claude/f4/img/minesec_sheet.png">    </p:cNvPr>
+          <p:cNvPicPr>
+            <a:picLocks noChangeAspect="1"/>
+          </p:cNvPicPr>
+          <p:nvPr/>
+        </p:nvPicPr>
+        <p:blipFill>
+          <a:blip r:embed="rId1"/>
+          <a:stretch>
+            <a:fillRect/>
+          </a:stretch>
+        </p:blipFill>
+        <p:spPr>
+          <a:xfrm>
+            <a:off x="0" y="658368"/>
+            <a:ext cx="5120640" cy="5833872"/>
+          </a:xfrm>
+          <a:prstGeom prst="rect">
+            <a:avLst/>
+          </a:prstGeom>
+        </p:spPr>
+      </p:pic>
+      <p:sp>
+        <p:nvSpPr>
+          <p:cNvPr id="4" name="Text 1"/>
+          <p:cNvSpPr/>
+          <p:nvPr/>
+        </p:nvSpPr>
+        <p:spPr>
+          <a:xfrm>
+            <a:off x="5349240" y="1005840"/>
+            <a:ext cx="6522415" cy="731520"/>
+          </a:xfrm>
+          <a:prstGeom prst="rect">
+            <a:avLst/>
+          </a:prstGeom>
+          <a:noFill/>
+          <a:ln/>
+        </p:spPr>
+        <p:txBody>
+          <a:bodyPr wrap="square" lIns="0" tIns="0" rIns="0" bIns="0" rtlCol="0" anchor="ctr">
+            <a:normAutofit/>
+          </a:bodyPr>
+          <a:lstStyle/>
+          <a:p>
+            <a:pPr algn="ctr" indent="0" marL="0">
+              <a:buNone/>
+            </a:pPr>
+            <a:r>
+              <a:rPr lang="en-US" sz="3600" b="1" dirty="0">
+                <a:solidFill>
+                  <a:srgbClr val="990011"/>
+                </a:solidFill>
+                <a:latin typeface="Times New Roman" pitchFamily="34" charset="0"/>
+                <a:ea typeface="Times New Roman" pitchFamily="34" charset="-122"/>
+                <a:cs typeface="Times New Roman" pitchFamily="34" charset="-120"/>
+              </a:rPr>
+              <a:t>Next Lesson</a:t>
+            </a:r>
+            <a:endParaRPr lang="en-US" sz="3600" dirty="0"/>
+          </a:p>
+        </p:txBody>
+      </p:sp>
+      <p:sp>
+        <p:nvSpPr>
+          <p:cNvPr id="5" name="Text 2"/>
+          <p:cNvSpPr/>
+          <p:nvPr/>
+        </p:nvSpPr>
+        <p:spPr>
+          <a:xfrm>
+            <a:off x="5349240" y="1783080"/>
+            <a:ext cx="6522415" cy="4663440"/>
+          </a:xfrm>
+          <a:prstGeom prst="rect">
+            <a:avLst/>
+          </a:prstGeom>
+          <a:noFill/>
+          <a:ln/>
+        </p:spPr>
+        <p:txBody>
+          <a:bodyPr wrap="square" lIns="0" tIns="0" rIns="0" bIns="0" rtlCol="0" anchor="ctr"/>
+          <a:lstStyle/>
+          <a:p>
+            <a:pPr algn="ctr" indent="0" marL="0">
+              <a:spcAft>
+                <a:spcPts val="800"/>
+              </a:spcAft>
+              <a:buNone/>
+            </a:pPr>
+            <a:r>
+              <a:rPr lang="en-US" sz="4000" b="1" dirty="0">
+                <a:solidFill>
+                  <a:srgbClr val="111111"/>
+                </a:solidFill>
+                <a:latin typeface="Times New Roman" pitchFamily="34" charset="0"/>
+                <a:ea typeface="Times New Roman" pitchFamily="34" charset="-122"/>
+                <a:cs typeface="Times New Roman" pitchFamily="34" charset="-120"/>
+              </a:rPr>
+              <a:t>Our next lesson will be on:</a:t>
+            </a:r>
+            <a:endParaRPr lang="en-US" sz="4000" dirty="0"/>
+          </a:p>
+          <a:p>
+            <a:pPr algn="ctr" indent="0" marL="0">
+              <a:spcAft>
+                <a:spcPts val="800"/>
+              </a:spcAft>
+              <a:buNone/>
+            </a:pPr>
+            <a:r>
+              <a:rPr lang="en-US" sz="4000" b="1" dirty="0">
+                <a:solidFill>
+                  <a:srgbClr val="990011"/>
+                </a:solidFill>
+                <a:latin typeface="Times New Roman" pitchFamily="34" charset="0"/>
+                <a:ea typeface="Times New Roman" pitchFamily="34" charset="-122"/>
+                <a:cs typeface="Times New Roman" pitchFamily="34" charset="-120"/>
+              </a:rPr>
+              <a:t>Practical Work 1: Location of Economic Activities and Description of Land Use</a:t>
+            </a:r>
+            <a:endParaRPr lang="en-US" sz="4000" dirty="0"/>
+          </a:p>
+        </p:txBody>
+      </p:sp>
+      <p:sp>
+        <p:nvSpPr>
+          <p:cNvPr id="25" name="Slide Number Placeholder 0"/>
+          <p:cNvSpPr>
+            <a:spLocks noGrp="1"/>
+          </p:cNvSpPr>
+          <p:nvPr>
+            <p:ph type="sldNum" sz="quarter" idx="4294967295"/>
+          </p:nvPr>
+        </p:nvSpPr>
+        <p:spPr>
+          <a:xfrm>
+            <a:off x="27432" y="91440"/>
+            <a:ext cx="585216" cy="475488"/>
+          </a:xfrm>
+          <a:prstGeom prst="rect">
+            <a:avLst/>
+          </a:prstGeom>
+          <a:extLst>
+            <a:ext uri="{C572A759-6A51-4108-AA02-DFA0A04FC94B}">
+              <ma14:wrappingTextBoxFlag xmlns:ma14="http://schemas.microsoft.com/office/mac/drawingml/2011/main" val="0"/>
+            </a:ext>
+          </a:extLst>
+        </p:spPr>
+        <p:txBody>
+          <a:bodyPr/>
+          <a:lstStyle>
+            <a:lvl1pPr>
+              <a:defRPr sz="2000">
+                <a:solidFill>
+                  <a:srgbClr val="FFFFFF"/>
+                </a:solidFill>
+                <a:latin typeface="Calibri"/>
+                <a:ea typeface="Calibri"/>
+                <a:cs typeface="Calibri"/>
+              </a:defRPr>
+            </a:lvl1pPr>
+          </a:lstStyle>
+          <a:p>
+            <a:pPr algn="ctr"/>
+            <a:fld id="{F7021451-1387-4CA6-816F-3879F97B5CBC}" type="slidenum">
+              <a:rPr b="1" lang="en-US"/>
+              <a:t>52</a:t>
+            </a:fld>
+            <a:endParaRPr lang="en-US"/>
+          </a:p>
+        </p:txBody>
+      </p:sp>
+    </p:spTree>
+  </p:cSld>
+  <p:clrMapOvr>
+    <a:masterClrMapping/>
+  </p:clrMapOvr>
+</p:sld>
+</file>
+
+<file path=ppt/slides/slide53.xml><?xml version="1.0" encoding="utf-8"?>
+<p:sld xmlns:a="http://schemas.openxmlformats.org/drawingml/2006/main" xmlns:r="http://schemas.openxmlformats.org/officeDocument/2006/relationships" xmlns:p="http://schemas.openxmlformats.org/presentationml/2006/main">
+  <p:cSld name="Slide 53">
+    <p:spTree>
+      <p:nvGrpSpPr>
+        <p:cNvPr id="1" name=""/>
+        <p:cNvGrpSpPr/>
+        <p:nvPr/>
+      </p:nvGrpSpPr>
+      <p:grpSpPr>
+        <a:xfrm>
+          <a:off x="0" y="0"/>
+          <a:ext cx="0" cy="0"/>
+          <a:chOff x="0" y="0"/>
+          <a:chExt cx="0" cy="0"/>
+        </a:xfrm>
+      </p:grpSpPr>
+      <p:sp>
+        <p:nvSpPr>
+          <p:cNvPr id="2" name="Text 0"/>
+          <p:cNvSpPr/>
+          <p:nvPr/>
+        </p:nvSpPr>
+        <p:spPr>
+          <a:xfrm>
+            <a:off x="457200" y="713232"/>
+            <a:ext cx="11368735" cy="274320"/>
+          </a:xfrm>
+          <a:prstGeom prst="rect">
+            <a:avLst/>
+          </a:prstGeom>
+          <a:noFill/>
+          <a:ln/>
+        </p:spPr>
+        <p:txBody>
+          <a:bodyPr wrap="square" lIns="0" tIns="0" rIns="0" bIns="0" rtlCol="0" anchor="ctr"/>
+          <a:lstStyle/>
+          <a:p>
+            <a:pPr algn="r" indent="0" marL="0">
+              <a:buNone/>
+            </a:pPr>
+            <a:r>
+              <a:rPr lang="en-US" sz="1400" b="1" dirty="0">
+                <a:solidFill>
+                  <a:srgbClr val="1C3F6E"/>
+                </a:solidFill>
+                <a:latin typeface="Calibri" pitchFamily="34" charset="0"/>
+                <a:ea typeface="Calibri" pitchFamily="34" charset="-122"/>
+                <a:cs typeface="Calibri" pitchFamily="34" charset="-120"/>
+              </a:rPr>
               <a:t>BILINGUAL GAME</a:t>
             </a:r>
             <a:endParaRPr lang="en-US" sz="1400" dirty="0"/>
@@ -16962,7 +19269,7 @@
       </p:sp>
       <p:graphicFrame>
         <p:nvGraphicFramePr>
-          <p:cNvPr id="49" name="Table 0"/>
+          <p:cNvPr id="54" name="Table 0"/>
           <p:cNvGraphicFramePr>
             <a:graphicFrameLocks noGrp="1"/>
           </p:cNvGraphicFramePr>
@@ -17998,7 +20305,7 @@
             <a:pPr algn="ctr"/>
             <a:fld id="{F7021451-1387-4CA6-816F-3879F97B5CBC}" type="slidenum">
               <a:rPr b="1" lang="en-US"/>
-              <a:t>48</a:t>
+              <a:t>53</a:t>
             </a:fld>
             <a:endParaRPr lang="en-US"/>
           </a:p>
@@ -18012,9 +20319,9 @@
 </p:sld>
 </file>
 
-<file path=ppt/slides/slide49.xml><?xml version="1.0" encoding="utf-8"?>
+<file path=ppt/slides/slide54.xml><?xml version="1.0" encoding="utf-8"?>
 <p:sld xmlns:a="http://schemas.openxmlformats.org/drawingml/2006/main" xmlns:r="http://schemas.openxmlformats.org/officeDocument/2006/relationships" xmlns:p="http://schemas.openxmlformats.org/presentationml/2006/main">
-  <p:cSld name="Slide 49">
+  <p:cSld name="Slide 54">
     <p:spTree>
       <p:nvGrpSpPr>
         <p:cNvPr id="1" name=""/>
@@ -18109,7 +20416,7 @@
       </p:sp>
       <p:graphicFrame>
         <p:nvGraphicFramePr>
-          <p:cNvPr id="50" name="Table 0"/>
+          <p:cNvPr id="55" name="Table 0"/>
           <p:cNvGraphicFramePr>
             <a:graphicFrameLocks noGrp="1"/>
           </p:cNvGraphicFramePr>
@@ -18731,7 +21038,7 @@
             <a:pPr algn="ctr"/>
             <a:fld id="{F7021451-1387-4CA6-816F-3879F97B5CBC}" type="slidenum">
               <a:rPr b="1" lang="en-US"/>
-              <a:t>49</a:t>
+              <a:t>54</a:t>
             </a:fld>
             <a:endParaRPr lang="en-US"/>
           </a:p>
@@ -18745,9 +21052,9 @@
 </p:sld>
 </file>
 
-<file path=ppt/slides/slide5.xml><?xml version="1.0" encoding="utf-8"?>
+<file path=ppt/slides/slide55.xml><?xml version="1.0" encoding="utf-8"?>
 <p:sld xmlns:a="http://schemas.openxmlformats.org/drawingml/2006/main" xmlns:r="http://schemas.openxmlformats.org/officeDocument/2006/relationships" xmlns:p="http://schemas.openxmlformats.org/presentationml/2006/main">
-  <p:cSld name="Slide 5">
+  <p:cSld name="Slide 55">
     <p:spTree>
       <p:nvGrpSpPr>
         <p:cNvPr id="1" name=""/>
@@ -18795,225 +21102,6 @@
                 <a:ea typeface="Calibri" pitchFamily="34" charset="-122"/>
                 <a:cs typeface="Calibri" pitchFamily="34" charset="-120"/>
               </a:rPr>
-              <a:t>HOMEWORK CORRECTION</a:t>
-            </a:r>
-            <a:endParaRPr lang="en-US" sz="1400" dirty="0"/>
-          </a:p>
-        </p:txBody>
-      </p:sp>
-      <p:pic>
-        <p:nvPicPr>
-          <p:cNvPr id="3" name="Image 0" descr="/home/claude/f4/img/minesec_sheet.png">    </p:cNvPr>
-          <p:cNvPicPr>
-            <a:picLocks noChangeAspect="1"/>
-          </p:cNvPicPr>
-          <p:nvPr/>
-        </p:nvPicPr>
-        <p:blipFill>
-          <a:blip r:embed="rId1"/>
-          <a:stretch>
-            <a:fillRect/>
-          </a:stretch>
-        </p:blipFill>
-        <p:spPr>
-          <a:xfrm>
-            <a:off x="0" y="658368"/>
-            <a:ext cx="5120640" cy="5833872"/>
-          </a:xfrm>
-          <a:prstGeom prst="rect">
-            <a:avLst/>
-          </a:prstGeom>
-        </p:spPr>
-      </p:pic>
-      <p:sp>
-        <p:nvSpPr>
-          <p:cNvPr id="4" name="Text 1"/>
-          <p:cNvSpPr/>
-          <p:nvPr/>
-        </p:nvSpPr>
-        <p:spPr>
-          <a:xfrm>
-            <a:off x="5349240" y="1005840"/>
-            <a:ext cx="6522415" cy="731520"/>
-          </a:xfrm>
-          <a:prstGeom prst="rect">
-            <a:avLst/>
-          </a:prstGeom>
-          <a:noFill/>
-          <a:ln/>
-        </p:spPr>
-        <p:txBody>
-          <a:bodyPr wrap="square" lIns="0" tIns="0" rIns="0" bIns="0" rtlCol="0" anchor="ctr">
-            <a:normAutofit/>
-          </a:bodyPr>
-          <a:lstStyle/>
-          <a:p>
-            <a:pPr algn="ctr" indent="0" marL="0">
-              <a:buNone/>
-            </a:pPr>
-            <a:r>
-              <a:rPr lang="en-US" sz="3600" b="1" dirty="0">
-                <a:solidFill>
-                  <a:srgbClr val="990011"/>
-                </a:solidFill>
-                <a:latin typeface="Times New Roman" pitchFamily="34" charset="0"/>
-                <a:ea typeface="Times New Roman" pitchFamily="34" charset="-122"/>
-                <a:cs typeface="Times New Roman" pitchFamily="34" charset="-120"/>
-              </a:rPr>
-              <a:t>Correction: Possible Answer</a:t>
-            </a:r>
-            <a:endParaRPr lang="en-US" sz="3600" dirty="0"/>
-          </a:p>
-        </p:txBody>
-      </p:sp>
-      <p:sp>
-        <p:nvSpPr>
-          <p:cNvPr id="5" name="Text 2"/>
-          <p:cNvSpPr/>
-          <p:nvPr/>
-        </p:nvSpPr>
-        <p:spPr>
-          <a:xfrm>
-            <a:off x="5349240" y="1783080"/>
-            <a:ext cx="6522415" cy="4663440"/>
-          </a:xfrm>
-          <a:prstGeom prst="rect">
-            <a:avLst/>
-          </a:prstGeom>
-          <a:noFill/>
-          <a:ln/>
-        </p:spPr>
-        <p:txBody>
-          <a:bodyPr wrap="square" lIns="0" tIns="0" rIns="0" bIns="0" rtlCol="0" anchor="t"/>
-          <a:lstStyle/>
-          <a:p>
-            <a:pPr algn="l" indent="0" marL="0">
-              <a:spcAft>
-                <a:spcPts val="800"/>
-              </a:spcAft>
-              <a:buNone/>
-            </a:pPr>
-            <a:r>
-              <a:rPr lang="en-US" sz="4000" dirty="0">
-                <a:solidFill>
-                  <a:srgbClr val="111111"/>
-                </a:solidFill>
-                <a:latin typeface="Times New Roman" pitchFamily="34" charset="0"/>
-                <a:ea typeface="Times New Roman" pitchFamily="34" charset="-122"/>
-                <a:cs typeface="Times New Roman" pitchFamily="34" charset="-120"/>
-              </a:rPr>
-              <a:t>Example: the Mbandjock sugar factory is near the cane fields because cane loses much weight when processed (weight-losing industry), so it is cheaper to carry sugar than cane.</a:t>
-            </a:r>
-            <a:endParaRPr lang="en-US" sz="4000" dirty="0"/>
-          </a:p>
-        </p:txBody>
-      </p:sp>
-      <p:sp>
-        <p:nvSpPr>
-          <p:cNvPr id="25" name="Slide Number Placeholder 0"/>
-          <p:cNvSpPr>
-            <a:spLocks noGrp="1"/>
-          </p:cNvSpPr>
-          <p:nvPr>
-            <p:ph type="sldNum" sz="quarter" idx="4294967295"/>
-          </p:nvPr>
-        </p:nvSpPr>
-        <p:spPr>
-          <a:xfrm>
-            <a:off x="27432" y="91440"/>
-            <a:ext cx="585216" cy="475488"/>
-          </a:xfrm>
-          <a:prstGeom prst="rect">
-            <a:avLst/>
-          </a:prstGeom>
-          <a:extLst>
-            <a:ext uri="{C572A759-6A51-4108-AA02-DFA0A04FC94B}">
-              <ma14:wrappingTextBoxFlag xmlns:ma14="http://schemas.microsoft.com/office/mac/drawingml/2011/main" val="0"/>
-            </a:ext>
-          </a:extLst>
-        </p:spPr>
-        <p:txBody>
-          <a:bodyPr/>
-          <a:lstStyle>
-            <a:lvl1pPr>
-              <a:defRPr sz="2000">
-                <a:solidFill>
-                  <a:srgbClr val="FFFFFF"/>
-                </a:solidFill>
-                <a:latin typeface="Calibri"/>
-                <a:ea typeface="Calibri"/>
-                <a:cs typeface="Calibri"/>
-              </a:defRPr>
-            </a:lvl1pPr>
-          </a:lstStyle>
-          <a:p>
-            <a:pPr algn="ctr"/>
-            <a:fld id="{F7021451-1387-4CA6-816F-3879F97B5CBC}" type="slidenum">
-              <a:rPr b="1" lang="en-US"/>
-              <a:t>5</a:t>
-            </a:fld>
-            <a:endParaRPr lang="en-US"/>
-          </a:p>
-        </p:txBody>
-      </p:sp>
-    </p:spTree>
-  </p:cSld>
-  <p:clrMapOvr>
-    <a:masterClrMapping/>
-  </p:clrMapOvr>
-</p:sld>
-</file>
-
-<file path=ppt/slides/slide50.xml><?xml version="1.0" encoding="utf-8"?>
-<p:sld xmlns:a="http://schemas.openxmlformats.org/drawingml/2006/main" xmlns:r="http://schemas.openxmlformats.org/officeDocument/2006/relationships" xmlns:p="http://schemas.openxmlformats.org/presentationml/2006/main">
-  <p:cSld name="Slide 50">
-    <p:spTree>
-      <p:nvGrpSpPr>
-        <p:cNvPr id="1" name=""/>
-        <p:cNvGrpSpPr/>
-        <p:nvPr/>
-      </p:nvGrpSpPr>
-      <p:grpSpPr>
-        <a:xfrm>
-          <a:off x="0" y="0"/>
-          <a:ext cx="0" cy="0"/>
-          <a:chOff x="0" y="0"/>
-          <a:chExt cx="0" cy="0"/>
-        </a:xfrm>
-      </p:grpSpPr>
-      <p:sp>
-        <p:nvSpPr>
-          <p:cNvPr id="2" name="Text 0"/>
-          <p:cNvSpPr/>
-          <p:nvPr/>
-        </p:nvSpPr>
-        <p:spPr>
-          <a:xfrm>
-            <a:off x="457200" y="713232"/>
-            <a:ext cx="11368735" cy="274320"/>
-          </a:xfrm>
-          <a:prstGeom prst="rect">
-            <a:avLst/>
-          </a:prstGeom>
-          <a:noFill/>
-          <a:ln/>
-        </p:spPr>
-        <p:txBody>
-          <a:bodyPr wrap="square" lIns="0" tIns="0" rIns="0" bIns="0" rtlCol="0" anchor="ctr"/>
-          <a:lstStyle/>
-          <a:p>
-            <a:pPr algn="r" indent="0" marL="0">
-              <a:buNone/>
-            </a:pPr>
-            <a:r>
-              <a:rPr lang="en-US" sz="1400" b="1" dirty="0">
-                <a:solidFill>
-                  <a:srgbClr val="1C3F6E"/>
-                </a:solidFill>
-                <a:latin typeface="Calibri" pitchFamily="34" charset="0"/>
-                <a:ea typeface="Calibri" pitchFamily="34" charset="-122"/>
-                <a:cs typeface="Calibri" pitchFamily="34" charset="-120"/>
-              </a:rPr>
               <a:t>LOGBOOK</a:t>
             </a:r>
             <a:endParaRPr lang="en-US" sz="1400" dirty="0"/>
@@ -19061,7 +21149,7 @@
       </p:sp>
       <p:graphicFrame>
         <p:nvGraphicFramePr>
-          <p:cNvPr id="51" name="Table 0"/>
+          <p:cNvPr id="56" name="Table 0"/>
           <p:cNvGraphicFramePr>
             <a:graphicFrameLocks noGrp="1"/>
           </p:cNvGraphicFramePr>
@@ -19171,7 +21259,7 @@
                           <a:ea typeface="Calibri" pitchFamily="34" charset="-122"/>
                           <a:cs typeface="Calibri" pitchFamily="34" charset="-120"/>
                         </a:rPr>
-                        <a:t>Types and Distribution; Importance and Problems; Government Efforts.</a:t>
+                        <a:t>Types of Industries; Distribution; Importance; Problems; Government Efforts.</a:t>
                       </a:r>
                       <a:endParaRPr lang="en-US" sz="1600" dirty="0">
                         <a:latin typeface="Calibri" charset="0"/>
@@ -19821,7 +21909,7 @@
             <a:pPr algn="ctr"/>
             <a:fld id="{F7021451-1387-4CA6-816F-3879F97B5CBC}" type="slidenum">
               <a:rPr b="1" lang="en-US"/>
-              <a:t>50</a:t>
+              <a:t>55</a:t>
             </a:fld>
             <a:endParaRPr lang="en-US"/>
           </a:p>
@@ -19835,9 +21923,9 @@
 </p:sld>
 </file>
 
-<file path=ppt/slides/slide51.xml><?xml version="1.0" encoding="utf-8"?>
+<file path=ppt/slides/slide56.xml><?xml version="1.0" encoding="utf-8"?>
 <p:sld xmlns:a="http://schemas.openxmlformats.org/drawingml/2006/main" xmlns:r="http://schemas.openxmlformats.org/officeDocument/2006/relationships" xmlns:p="http://schemas.openxmlformats.org/presentationml/2006/main">
-  <p:cSld name="Slide 51">
+  <p:cSld name="Slide 56">
     <p:spTree>
       <p:nvGrpSpPr>
         <p:cNvPr id="1" name=""/>
@@ -20146,7 +22234,7 @@
             <a:pPr algn="ctr"/>
             <a:fld id="{F7021451-1387-4CA6-816F-3879F97B5CBC}" type="slidenum">
               <a:rPr b="1" lang="en-US"/>
-              <a:t>51</a:t>
+              <a:t>56</a:t>
             </a:fld>
             <a:endParaRPr lang="en-US"/>
           </a:p>
@@ -20160,9 +22248,9 @@
 </p:sld>
 </file>
 
-<file path=ppt/slides/slide52.xml><?xml version="1.0" encoding="utf-8"?>
+<file path=ppt/slides/slide57.xml><?xml version="1.0" encoding="utf-8"?>
 <p:sld xmlns:a="http://schemas.openxmlformats.org/drawingml/2006/main" xmlns:r="http://schemas.openxmlformats.org/officeDocument/2006/relationships" xmlns:p="http://schemas.openxmlformats.org/presentationml/2006/main">
-  <p:cSld name="Slide 52">
+  <p:cSld name="Slide 57">
     <p:spTree>
       <p:nvGrpSpPr>
         <p:cNvPr id="1" name=""/>
@@ -20471,7 +22559,7 @@
             <a:pPr algn="ctr"/>
             <a:fld id="{F7021451-1387-4CA6-816F-3879F97B5CBC}" type="slidenum">
               <a:rPr b="1" lang="en-US"/>
-              <a:t>52</a:t>
+              <a:t>57</a:t>
             </a:fld>
             <a:endParaRPr lang="en-US"/>
           </a:p>
